--- a/source/galois_theory_intro_en_v1_12.pptx
+++ b/source/galois_theory_intro_en_v1_12.pptx
@@ -4639,2367 +4639,6 @@
 </file>
 
 <file path=ppt/slides/slide15.xml><?xml version="1.0" encoding="utf-8"?>
-<p:sld xmlns:a="http://schemas.openxmlformats.org/drawingml/2006/main" xmlns:r="http://schemas.openxmlformats.org/officeDocument/2006/relationships" xmlns:p="http://schemas.openxmlformats.org/presentationml/2006/main">
-  <p:cSld name="Slide 15">
-    <p:bg>
-      <p:bgPr>
-        <a:solidFill>
-          <a:srgbClr val="FFFFFF"/>
-        </a:solidFill>
-        <a:effectLst/>
-      </p:bgPr>
-    </p:bg>
-    <p:spTree>
-      <p:nvGrpSpPr>
-        <p:cNvPr id="1" name=""/>
-        <p:cNvGrpSpPr/>
-        <p:nvPr/>
-      </p:nvGrpSpPr>
-      <p:grpSpPr>
-        <a:xfrm>
-          <a:off x="0" y="0"/>
-          <a:ext cx="0" cy="0"/>
-          <a:chOff x="0" y="0"/>
-          <a:chExt cx="0" cy="0"/>
-        </a:xfrm>
-      </p:grpSpPr>
-      <p:sp>
-        <p:nvSpPr>
-          <p:cNvPr id="2" name="Shape 0"/>
-          <p:cNvSpPr/>
-          <p:nvPr/>
-        </p:nvSpPr>
-        <p:spPr>
-          <a:xfrm>
-            <a:off x="640080" y="502920"/>
-            <a:ext cx="146304" cy="146304"/>
-          </a:xfrm>
-          <a:prstGeom prst="ellipse">
-            <a:avLst/>
-          </a:prstGeom>
-          <a:solidFill>
-            <a:srgbClr val="0F9E8E"/>
-          </a:solidFill>
-          <a:ln/>
-        </p:spPr>
-        <p:txBody>
-          <a:bodyPr/>
-          <a:p/>
-        </p:txBody>
-      </p:sp>
-      <p:sp>
-        <p:nvSpPr>
-          <p:cNvPr id="3" name="Text 1"/>
-          <p:cNvSpPr/>
-          <p:nvPr/>
-        </p:nvSpPr>
-        <p:spPr>
-          <a:xfrm>
-            <a:off x="896112" y="393192"/>
-            <a:ext cx="5486400" cy="365760"/>
-          </a:xfrm>
-          <a:prstGeom prst="rect">
-            <a:avLst/>
-          </a:prstGeom>
-          <a:noFill/>
-          <a:ln/>
-        </p:spPr>
-        <p:txBody>
-          <a:bodyPr wrap="square" lIns="0" tIns="0" rIns="0" bIns="0" rtlCol="0" anchor="ctr"/>
-          <a:lstStyle/>
-          <a:p>
-            <a:pPr marL="0" indent="0">
-              <a:buNone/>
-            </a:pPr>
-            <a:r>
-              <a:rPr lang="en-US" sz="1600" b="1" dirty="0">
-                <a:solidFill>
-                  <a:srgbClr val="0F9E8E"/>
-                </a:solidFill>
-                <a:latin typeface="Noto Sans CJK JP" pitchFamily="34" charset="0"/>
-                <a:ea typeface="Noto Sans CJK JP"/>
-                <a:cs typeface="Noto Sans CJK JP" pitchFamily="34" charset="-120"/>
-              </a:rPr>
-              <a:t>Appendix 2</a:t>
-            </a:r>
-            <a:endParaRPr lang="en-US" sz="1600" dirty="0"/>
-          </a:p>
-        </p:txBody>
-      </p:sp>
-      <p:sp>
-        <p:nvSpPr>
-          <p:cNvPr id="4" name="Text 2"/>
-          <p:cNvSpPr/>
-          <p:nvPr/>
-        </p:nvSpPr>
-        <p:spPr>
-          <a:xfrm>
-            <a:off x="640080" y="822960"/>
-            <a:ext cx="10972800" cy="640080"/>
-          </a:xfrm>
-          <a:prstGeom prst="rect">
-            <a:avLst/>
-          </a:prstGeom>
-          <a:noFill/>
-          <a:ln/>
-        </p:spPr>
-        <p:txBody>
-          <a:bodyPr wrap="square" lIns="0" tIns="0" rIns="0" bIns="0" rtlCol="0" anchor="ctr"/>
-          <a:lstStyle/>
-          <a:p>
-            <a:pPr marL="0" indent="0">
-              <a:buNone/>
-            </a:pPr>
-            <a:r>
-              <a:rPr lang="en-US" sz="2800" b="1" dirty="0">
-                <a:solidFill>
-                  <a:srgbClr val="1A2238"/>
-                </a:solidFill>
-                <a:latin typeface="Noto Sans CJK JP" pitchFamily="34" charset="0"/>
-                <a:ea typeface="Noto Sans CJK JP"/>
-                <a:cs typeface="Noto Sans CJK JP" pitchFamily="34" charset="-120"/>
-              </a:rPr>
-              <a:t>The shrinking chain for x³−2 and the solvability conclusion</a:t>
-            </a:r>
-            <a:endParaRPr lang="en-US" sz="2800" dirty="0"/>
-          </a:p>
-        </p:txBody>
-      </p:sp>
-      <p:sp>
-        <p:nvSpPr>
-          <p:cNvPr id="5" name="Text 3"/>
-          <p:cNvSpPr/>
-          <p:nvPr/>
-        </p:nvSpPr>
-        <p:spPr>
-          <a:xfrm>
-            <a:off x="640080" y="1554480"/>
-            <a:ext cx="10058400" cy="365760"/>
-          </a:xfrm>
-          <a:prstGeom prst="rect">
-            <a:avLst/>
-          </a:prstGeom>
-          <a:noFill/>
-          <a:ln/>
-        </p:spPr>
-        <p:txBody>
-          <a:bodyPr wrap="square" lIns="0" tIns="0" rIns="0" bIns="0" rtlCol="0" anchor="ctr"/>
-          <a:lstStyle/>
-          <a:p>
-            <a:pPr marL="0" indent="0">
-              <a:buNone/>
-            </a:pPr>
-            <a:r>
-              <a:rPr lang="en-US" sz="1600" b="1" dirty="0">
-                <a:solidFill>
-                  <a:srgbClr val="0F9E8E"/>
-                </a:solidFill>
-                <a:latin typeface="Noto Sans CJK JP" pitchFamily="34" charset="0"/>
-                <a:ea typeface="Noto Sans CJK JP"/>
-                <a:cs typeface="Noto Sans CJK JP" pitchFamily="34" charset="-120"/>
-              </a:rPr>
-              <a:t>Two steps to solve x³−2=0</a:t>
-            </a:r>
-            <a:endParaRPr lang="en-US" sz="1600" dirty="0"/>
-          </a:p>
-        </p:txBody>
-      </p:sp>
-      <p:sp>
-        <p:nvSpPr>
-          <p:cNvPr id="6" name="Shape 4"/>
-          <p:cNvSpPr/>
-          <p:nvPr/>
-        </p:nvSpPr>
-        <p:spPr>
-          <a:xfrm>
-            <a:off x="640080" y="1965960"/>
-            <a:ext cx="5303520" cy="1371600"/>
-          </a:xfrm>
-          <a:prstGeom prst="roundRect">
-            <a:avLst>
-              <a:gd name="adj" fmla="val 5333"/>
-            </a:avLst>
-          </a:prstGeom>
-          <a:solidFill>
-            <a:srgbClr val="E5F5F2"/>
-          </a:solidFill>
-          <a:ln w="12700">
-            <a:solidFill>
-              <a:srgbClr val="0F9E8E"/>
-            </a:solidFill>
-            <a:prstDash val="solid"/>
-          </a:ln>
-        </p:spPr>
-        <p:txBody>
-          <a:bodyPr/>
-          <a:p/>
-        </p:txBody>
-      </p:sp>
-      <p:sp>
-        <p:nvSpPr>
-          <p:cNvPr id="7" name="Text 5"/>
-          <p:cNvSpPr/>
-          <p:nvPr/>
-        </p:nvSpPr>
-        <p:spPr>
-          <a:xfrm>
-            <a:off x="868680" y="2075688"/>
-            <a:ext cx="4846320" cy="365760"/>
-          </a:xfrm>
-          <a:prstGeom prst="rect">
-            <a:avLst/>
-          </a:prstGeom>
-          <a:noFill/>
-          <a:ln/>
-        </p:spPr>
-        <p:txBody>
-          <a:bodyPr wrap="square" lIns="0" tIns="0" rIns="0" bIns="0" rtlCol="0" anchor="ctr"/>
-          <a:lstStyle/>
-          <a:p>
-            <a:pPr marL="0" indent="0">
-              <a:buNone/>
-            </a:pPr>
-            <a:r>
-              <a:rPr lang="en-US" sz="1600" b="1" dirty="0">
-                <a:solidFill>
-                  <a:srgbClr val="1A2238"/>
-                </a:solidFill>
-                <a:latin typeface="Noto Sans CJK JP" pitchFamily="34" charset="0"/>
-                <a:ea typeface="Noto Sans CJK JP"/>
-                <a:cs typeface="Noto Sans CJK JP" pitchFamily="34" charset="-120"/>
-              </a:rPr>
-              <a:t>STEP 1: adjoin ω</a:t>
-            </a:r>
-            <a:endParaRPr lang="en-US" sz="1600" dirty="0"/>
-          </a:p>
-        </p:txBody>
-      </p:sp>
-      <p:sp>
-        <p:nvSpPr>
-          <p:cNvPr id="8" name="Text 6"/>
-          <p:cNvSpPr/>
-          <p:nvPr/>
-        </p:nvSpPr>
-        <p:spPr>
-          <a:xfrm>
-            <a:off x="868680" y="2450592"/>
-            <a:ext cx="4937760" cy="868680"/>
-          </a:xfrm>
-          <a:prstGeom prst="rect">
-            <a:avLst/>
-          </a:prstGeom>
-          <a:noFill/>
-          <a:ln/>
-        </p:spPr>
-        <p:txBody>
-          <a:bodyPr wrap="square" lIns="0" tIns="0" rIns="0" bIns="0" rtlCol="0" anchor="t"/>
-          <a:lstStyle/>
-          <a:p>
-            <a:pPr marL="0" indent="0">
-              <a:lnSpc>
-                <a:spcPct val="120000"/>
-              </a:lnSpc>
-              <a:buNone/>
-            </a:pPr>
-            <a:r>
-              <a:rPr lang="en-US" sz="1300" dirty="0">
-                <a:solidFill>
-                  <a:srgbClr val="33384A"/>
-                </a:solidFill>
-                <a:latin typeface="Noto Sans CJK JP" pitchFamily="34" charset="0"/>
-                <a:ea typeface="Noto Sans CJK JP"/>
-                <a:cs typeface="Noto Sans CJK JP" pitchFamily="34" charset="-120"/>
-              </a:rPr>
-              <a:t>field: Q → L = Q(ω)</a:t>
-            </a:r>
-            <a:endParaRPr lang="en-US" sz="1300" dirty="0"/>
-          </a:p>
-          <a:p>
-            <a:pPr marL="0" indent="0">
-              <a:lnSpc>
-                <a:spcPct val="120000"/>
-              </a:lnSpc>
-              <a:buNone/>
-            </a:pPr>
-            <a:r>
-              <a:rPr lang="en-US" sz="1300" dirty="0">
-                <a:solidFill>
-                  <a:srgbClr val="33384A"/>
-                </a:solidFill>
-                <a:latin typeface="Noto Sans CJK JP" pitchFamily="34" charset="0"/>
-                <a:ea typeface="Noto Sans CJK JP"/>
-                <a:cs typeface="Noto Sans CJK JP" pitchFamily="34" charset="-120"/>
-              </a:rPr>
-              <a:t>group: S₃ → A₃ (order 3)</a:t>
-            </a:r>
-            <a:endParaRPr lang="en-US" sz="1300" dirty="0"/>
-          </a:p>
-          <a:p>
-            <a:pPr marL="0" indent="0">
-              <a:lnSpc>
-                <a:spcPct val="120000"/>
-              </a:lnSpc>
-              <a:buNone/>
-            </a:pPr>
-            <a:r>
-              <a:rPr lang="en-US" sz="1300" dirty="0">
-                <a:solidFill>
-                  <a:srgbClr val="3457A6"/>
-                </a:solidFill>
-                <a:latin typeface="Noto Sans CJK JP" pitchFamily="34" charset="0"/>
-                <a:ea typeface="Noto Sans CJK JP"/>
-                <a:cs typeface="Noto Sans CJK JP" pitchFamily="34" charset="-120"/>
-              </a:rPr>
-              <a:t>quotient order 2 = square root (√−3)</a:t>
-            </a:r>
-            <a:endParaRPr lang="en-US" sz="1300" dirty="0"/>
-          </a:p>
-        </p:txBody>
-      </p:sp>
-      <p:sp>
-        <p:nvSpPr>
-          <p:cNvPr id="9" name="Shape 7"/>
-          <p:cNvSpPr/>
-          <p:nvPr/>
-        </p:nvSpPr>
-        <p:spPr>
-          <a:xfrm>
-            <a:off x="6217920" y="1965960"/>
-            <a:ext cx="5303520" cy="1371600"/>
-          </a:xfrm>
-          <a:prstGeom prst="roundRect">
-            <a:avLst>
-              <a:gd name="adj" fmla="val 5333"/>
-            </a:avLst>
-          </a:prstGeom>
-          <a:solidFill>
-            <a:srgbClr val="E5F5F2"/>
-          </a:solidFill>
-          <a:ln w="12700">
-            <a:solidFill>
-              <a:srgbClr val="0F9E8E"/>
-            </a:solidFill>
-            <a:prstDash val="solid"/>
-          </a:ln>
-        </p:spPr>
-        <p:txBody>
-          <a:bodyPr/>
-          <a:p/>
-        </p:txBody>
-      </p:sp>
-      <p:sp>
-        <p:nvSpPr>
-          <p:cNvPr id="10" name="Text 8"/>
-          <p:cNvSpPr/>
-          <p:nvPr/>
-        </p:nvSpPr>
-        <p:spPr>
-          <a:xfrm>
-            <a:off x="6446520" y="2075688"/>
-            <a:ext cx="4846320" cy="365760"/>
-          </a:xfrm>
-          <a:prstGeom prst="rect">
-            <a:avLst/>
-          </a:prstGeom>
-          <a:noFill/>
-          <a:ln/>
-        </p:spPr>
-        <p:txBody>
-          <a:bodyPr wrap="square" lIns="0" tIns="0" rIns="0" bIns="0" rtlCol="0" anchor="ctr"/>
-          <a:lstStyle/>
-          <a:p>
-            <a:pPr marL="0" indent="0">
-              <a:buNone/>
-            </a:pPr>
-            <a:r>
-              <a:rPr lang="en-US" sz="1600" b="1" dirty="0">
-                <a:solidFill>
-                  <a:srgbClr val="1A2238"/>
-                </a:solidFill>
-                <a:latin typeface="Noto Sans CJK JP" pitchFamily="34" charset="0"/>
-                <a:ea typeface="Noto Sans CJK JP"/>
-                <a:cs typeface="Noto Sans CJK JP" pitchFamily="34" charset="-120"/>
-              </a:rPr>
-              <a:t>STEP 2: adjoin ³√2</a:t>
-            </a:r>
-            <a:endParaRPr lang="en-US" sz="1600" dirty="0"/>
-          </a:p>
-        </p:txBody>
-      </p:sp>
-      <p:sp>
-        <p:nvSpPr>
-          <p:cNvPr id="11" name="Text 9"/>
-          <p:cNvSpPr/>
-          <p:nvPr/>
-        </p:nvSpPr>
-        <p:spPr>
-          <a:xfrm>
-            <a:off x="6446520" y="2450592"/>
-            <a:ext cx="4937760" cy="868680"/>
-          </a:xfrm>
-          <a:prstGeom prst="rect">
-            <a:avLst/>
-          </a:prstGeom>
-          <a:noFill/>
-          <a:ln/>
-        </p:spPr>
-        <p:txBody>
-          <a:bodyPr wrap="square" lIns="0" tIns="0" rIns="0" bIns="0" rtlCol="0" anchor="t"/>
-          <a:lstStyle/>
-          <a:p>
-            <a:pPr marL="0" indent="0">
-              <a:lnSpc>
-                <a:spcPct val="120000"/>
-              </a:lnSpc>
-              <a:buNone/>
-            </a:pPr>
-            <a:r>
-              <a:rPr lang="en-US" sz="1300" dirty="0">
-                <a:solidFill>
-                  <a:srgbClr val="33384A"/>
-                </a:solidFill>
-                <a:latin typeface="Noto Sans CJK JP" pitchFamily="34" charset="0"/>
-                <a:ea typeface="Noto Sans CJK JP"/>
-                <a:cs typeface="Noto Sans CJK JP" pitchFamily="34" charset="-120"/>
-              </a:rPr>
-              <a:t>field: L → K = Q(ω, ³√2)</a:t>
-            </a:r>
-            <a:endParaRPr lang="en-US" sz="1300" dirty="0"/>
-          </a:p>
-          <a:p>
-            <a:pPr marL="0" indent="0">
-              <a:lnSpc>
-                <a:spcPct val="120000"/>
-              </a:lnSpc>
-              <a:buNone/>
-            </a:pPr>
-            <a:r>
-              <a:rPr lang="en-US" sz="1300" dirty="0">
-                <a:solidFill>
-                  <a:srgbClr val="33384A"/>
-                </a:solidFill>
-                <a:latin typeface="Noto Sans CJK JP" pitchFamily="34" charset="0"/>
-                <a:ea typeface="Noto Sans CJK JP"/>
-                <a:cs typeface="Noto Sans CJK JP" pitchFamily="34" charset="-120"/>
-              </a:rPr>
-              <a:t>group: A₃ → { e }</a:t>
-            </a:r>
-            <a:endParaRPr lang="en-US" sz="1300" dirty="0"/>
-          </a:p>
-          <a:p>
-            <a:pPr marL="0" indent="0">
-              <a:lnSpc>
-                <a:spcPct val="120000"/>
-              </a:lnSpc>
-              <a:buNone/>
-            </a:pPr>
-            <a:r>
-              <a:rPr lang="en-US" sz="1300" dirty="0">
-                <a:solidFill>
-                  <a:srgbClr val="3457A6"/>
-                </a:solidFill>
-                <a:latin typeface="Noto Sans CJK JP" pitchFamily="34" charset="0"/>
-                <a:ea typeface="Noto Sans CJK JP"/>
-                <a:cs typeface="Noto Sans CJK JP" pitchFamily="34" charset="-120"/>
-              </a:rPr>
-              <a:t>quotient order 3 = cube root</a:t>
-            </a:r>
-            <a:endParaRPr lang="en-US" sz="1300" dirty="0"/>
-          </a:p>
-        </p:txBody>
-      </p:sp>
-      <p:sp>
-        <p:nvSpPr>
-          <p:cNvPr id="12" name="Text 10"/>
-          <p:cNvSpPr/>
-          <p:nvPr/>
-        </p:nvSpPr>
-        <p:spPr>
-          <a:xfrm>
-            <a:off x="640080" y="3474720"/>
-            <a:ext cx="10881360" cy="365760"/>
-          </a:xfrm>
-          <a:prstGeom prst="rect">
-            <a:avLst/>
-          </a:prstGeom>
-          <a:noFill/>
-          <a:ln/>
-        </p:spPr>
-        <p:txBody>
-          <a:bodyPr wrap="square" lIns="0" tIns="0" rIns="0" bIns="0" rtlCol="0" anchor="ctr"/>
-          <a:lstStyle/>
-          <a:p>
-            <a:pPr marL="0" indent="0">
-              <a:buNone/>
-            </a:pPr>
-            <a:r>
-              <a:rPr lang="en-US" sz="1400" i="1" dirty="0">
-                <a:solidFill>
-                  <a:srgbClr val="6B7180"/>
-                </a:solidFill>
-                <a:latin typeface="Noto Sans CJK JP" pitchFamily="34" charset="0"/>
-                <a:ea typeface="Noto Sans CJK JP"/>
-                <a:cs typeface="Noto Sans CJK JP" pitchFamily="34" charset="-120"/>
-              </a:rPr>
-              <a:t>Once the group shrinks to { e }, no unknowns remain and the adjoined elements express the roots.</a:t>
-            </a:r>
-            <a:endParaRPr lang="en-US" sz="1400" dirty="0"/>
-          </a:p>
-        </p:txBody>
-      </p:sp>
-      <p:sp>
-        <p:nvSpPr>
-          <p:cNvPr id="13" name="Shape 11"/>
-          <p:cNvSpPr/>
-          <p:nvPr/>
-        </p:nvSpPr>
-        <p:spPr>
-          <a:xfrm>
-            <a:off x="640080" y="4023360"/>
-            <a:ext cx="64008" cy="2011680"/>
-          </a:xfrm>
-          <a:prstGeom prst="rect">
-            <a:avLst/>
-          </a:prstGeom>
-          <a:solidFill>
-            <a:srgbClr val="1A2238"/>
-          </a:solidFill>
-          <a:ln/>
-        </p:spPr>
-        <p:txBody>
-          <a:bodyPr/>
-          <a:p/>
-        </p:txBody>
-      </p:sp>
-      <p:sp>
-        <p:nvSpPr>
-          <p:cNvPr id="14" name="Text 12"/>
-          <p:cNvSpPr/>
-          <p:nvPr/>
-        </p:nvSpPr>
-        <p:spPr>
-          <a:xfrm>
-            <a:off x="868680" y="3977640"/>
-            <a:ext cx="10058400" cy="365760"/>
-          </a:xfrm>
-          <a:prstGeom prst="rect">
-            <a:avLst/>
-          </a:prstGeom>
-          <a:noFill/>
-          <a:ln/>
-        </p:spPr>
-        <p:txBody>
-          <a:bodyPr wrap="square" lIns="0" tIns="0" rIns="0" bIns="0" rtlCol="0" anchor="ctr"/>
-          <a:lstStyle/>
-          <a:p>
-            <a:pPr marL="0" indent="0">
-              <a:buNone/>
-            </a:pPr>
-            <a:r>
-              <a:rPr lang="en-US" sz="1600" b="1" dirty="0">
-                <a:solidFill>
-                  <a:srgbClr val="1A2238"/>
-                </a:solidFill>
-                <a:latin typeface="Noto Sans CJK JP" pitchFamily="34" charset="0"/>
-                <a:ea typeface="Noto Sans CJK JP"/>
-                <a:cs typeface="Noto Sans CJK JP" pitchFamily="34" charset="-120"/>
-              </a:rPr>
-              <a:t>Generalization: what "solvable by radicals" means</a:t>
-            </a:r>
-            <a:endParaRPr lang="en-US" sz="1600" dirty="0"/>
-          </a:p>
-        </p:txBody>
-      </p:sp>
-      <p:sp>
-        <p:nvSpPr>
-          <p:cNvPr id="15" name="Text 13"/>
-          <p:cNvSpPr/>
-          <p:nvPr/>
-        </p:nvSpPr>
-        <p:spPr>
-          <a:xfrm>
-            <a:off x="868680" y="4370832"/>
-            <a:ext cx="10607040" cy="1828800"/>
-          </a:xfrm>
-          <a:prstGeom prst="rect">
-            <a:avLst/>
-          </a:prstGeom>
-          <a:noFill/>
-          <a:ln/>
-        </p:spPr>
-        <p:txBody>
-          <a:bodyPr wrap="square" lIns="0" tIns="0" rIns="0" bIns="0" rtlCol="0" anchor="ctr"/>
-          <a:lstStyle/>
-          <a:p>
-            <a:pPr marL="0" indent="0">
-              <a:lnSpc>
-                <a:spcPct val="125000"/>
-              </a:lnSpc>
-              <a:buNone/>
-            </a:pPr>
-            <a:r>
-              <a:rPr lang="en-US" sz="1400" dirty="0">
-                <a:solidFill>
-                  <a:srgbClr val="33384A"/>
-                </a:solidFill>
-                <a:latin typeface="Noto Sans CJK JP" pitchFamily="34" charset="0"/>
-                <a:ea typeface="Noto Sans CJK JP"/>
-                <a:cs typeface="Noto Sans CJK JP" pitchFamily="34" charset="-120"/>
-              </a:rPr>
-              <a:t>At each step, the quotient of the larger group by the smaller (normal) subgroup must be cyclic. The order of that cyclic group equals the index of the radical adjoined at that step.</a:t>
-            </a:r>
-            <a:endParaRPr lang="en-US" sz="1400" dirty="0"/>
-          </a:p>
-          <a:p>
-            <a:pPr marL="0" indent="0">
-              <a:lnSpc>
-                <a:spcPct val="125000"/>
-              </a:lnSpc>
-              <a:buNone/>
-            </a:pPr>
-            <a:r>
-              <a:rPr lang="en-US" sz="1400" dirty="0">
-                <a:solidFill>
-                  <a:srgbClr val="33384A"/>
-                </a:solidFill>
-                <a:latin typeface="Noto Sans CJK JP" pitchFamily="34" charset="0"/>
-                <a:ea typeface="Noto Sans CJK JP"/>
-                <a:cs typeface="Noto Sans CJK JP" pitchFamily="34" charset="-120"/>
-              </a:rPr>
-              <a:t>Being solvable by radicals means this shrinking-and-growing repeats until the group reaches { e } and the field K reaches the splitting field.</a:t>
-            </a:r>
-            <a:endParaRPr lang="en-US" sz="1400" dirty="0"/>
-          </a:p>
-          <a:p>
-            <a:pPr marL="0" indent="0">
-              <a:lnSpc>
-                <a:spcPct val="125000"/>
-              </a:lnSpc>
-              <a:buNone/>
-            </a:pPr>
-            <a:r>
-              <a:rPr lang="en-US" sz="1400" b="1" dirty="0">
-                <a:solidFill>
-                  <a:srgbClr val="D8593A"/>
-                </a:solidFill>
-                <a:latin typeface="Noto Sans CJK JP" pitchFamily="34" charset="0"/>
-                <a:ea typeface="Noto Sans CJK JP"/>
-                <a:cs typeface="Noto Sans CJK JP" pitchFamily="34" charset="-120"/>
-              </a:rPr>
-              <a:t>Up to degree 4, such a chain exists for any coefficients, so all are solvable by radicals. From degree 5 up, some equations have no such chain; those that cannot reach { e } are not solvable by radicals.</a:t>
-            </a:r>
-            <a:endParaRPr lang="en-US" sz="1400" dirty="0"/>
-          </a:p>
-        </p:txBody>
-      </p:sp>
-      <p:sp>
-        <p:nvSpPr>
-          <p:cNvPr id="16" name="Text 14"/>
-          <p:cNvSpPr/>
-          <p:nvPr/>
-        </p:nvSpPr>
-        <p:spPr>
-          <a:xfrm>
-            <a:off x="11338560" y="6355080"/>
-            <a:ext cx="457200" cy="274320"/>
-          </a:xfrm>
-          <a:prstGeom prst="rect">
-            <a:avLst/>
-          </a:prstGeom>
-          <a:noFill/>
-          <a:ln/>
-        </p:spPr>
-        <p:txBody>
-          <a:bodyPr wrap="square" lIns="0" tIns="0" rIns="0" bIns="0" rtlCol="0" anchor="ctr"/>
-          <a:lstStyle/>
-          <a:p>
-            <a:pPr marL="0" indent="0" algn="r">
-              <a:buNone/>
-            </a:pPr>
-            <a:r>
-              <a:rPr lang="en-US" sz="1100" dirty="0">
-                <a:solidFill>
-                  <a:srgbClr val="6B7180"/>
-                </a:solidFill>
-                <a:latin typeface="Noto Sans CJK JP" pitchFamily="34" charset="0"/>
-                <a:ea typeface="Noto Sans CJK JP"/>
-                <a:cs typeface="Noto Sans CJK JP" pitchFamily="34" charset="-120"/>
-              </a:rPr>
-              <a:t>16</a:t>
-            </a:r>
-            <a:endParaRPr lang="en-US" sz="1100" dirty="0"/>
-          </a:p>
-        </p:txBody>
-      </p:sp>
-      <p:sp>
-        <p:nvSpPr>
-          <p:cNvPr id="17" name="Text 15"/>
-          <p:cNvSpPr/>
-          <p:nvPr/>
-        </p:nvSpPr>
-        <p:spPr>
-          <a:xfrm>
-            <a:off x="457200" y="6355080"/>
-            <a:ext cx="4572000" cy="274320"/>
-          </a:xfrm>
-          <a:prstGeom prst="rect">
-            <a:avLst/>
-          </a:prstGeom>
-          <a:noFill/>
-          <a:ln/>
-        </p:spPr>
-        <p:txBody>
-          <a:bodyPr wrap="square" lIns="0" tIns="0" rIns="0" bIns="0" rtlCol="0" anchor="ctr"/>
-          <a:lstStyle/>
-          <a:p>
-            <a:pPr marL="0" indent="0" algn="l">
-              <a:buNone/>
-            </a:pPr>
-            <a:r>
-              <a:rPr lang="en-US" sz="1000" dirty="0">
-                <a:solidFill>
-                  <a:srgbClr val="6B7180"/>
-                </a:solidFill>
-                <a:latin typeface="Noto Sans CJK JP" pitchFamily="34" charset="0"/>
-                <a:ea typeface="Noto Sans CJK JP"/>
-                <a:cs typeface="Noto Sans CJK JP" pitchFamily="34" charset="-120"/>
-              </a:rPr>
-              <a:t>5garashi.com Design Office</a:t>
-            </a:r>
-            <a:endParaRPr lang="en-US" sz="1000" dirty="0"/>
-          </a:p>
-        </p:txBody>
-      </p:sp>
-    </p:spTree>
-  </p:cSld>
-  <p:clrMapOvr>
-    <a:masterClrMapping/>
-  </p:clrMapOvr>
-</p:sld>
-</file>
-
-<file path=ppt/slides/slide16.xml><?xml version="1.0" encoding="utf-8"?>
-<p:sld xmlns:a="http://schemas.openxmlformats.org/drawingml/2006/main" xmlns:p="http://schemas.openxmlformats.org/presentationml/2006/main" xmlns:r="http://schemas.openxmlformats.org/officeDocument/2006/relationships">
-  <p:cSld>
-    <p:spTree>
-      <p:nvGrpSpPr>
-        <p:cNvPr id="1" name=""/>
-        <p:cNvGrpSpPr/>
-        <p:nvPr/>
-      </p:nvGrpSpPr>
-      <p:grpSpPr/>
-      <p:sp>
-        <p:nvSpPr>
-          <p:cNvPr id="2" name="Oval 1"/>
-          <p:cNvSpPr/>
-          <p:nvPr/>
-        </p:nvSpPr>
-        <p:spPr>
-          <a:xfrm>
-            <a:off x="640080" y="502920"/>
-            <a:ext cx="146304" cy="146304"/>
-          </a:xfrm>
-          <a:prstGeom prst="ellipse">
-            <a:avLst/>
-          </a:prstGeom>
-          <a:solidFill>
-            <a:srgbClr val="0F9E8E"/>
-          </a:solidFill>
-          <a:ln>
-            <a:noFill/>
-          </a:ln>
-          <a:effectLst/>
-        </p:spPr>
-        <p:style>
-          <a:lnRef idx="1">
-            <a:schemeClr val="accent1"/>
-          </a:lnRef>
-          <a:fillRef idx="3">
-            <a:schemeClr val="accent1"/>
-          </a:fillRef>
-          <a:effectRef idx="2">
-            <a:schemeClr val="accent1"/>
-          </a:effectRef>
-          <a:fontRef idx="minor">
-            <a:schemeClr val="lt1"/>
-          </a:fontRef>
-        </p:style>
-        <p:txBody>
-          <a:bodyPr rtlCol="0" anchor="ctr"/>
-          <a:lstStyle/>
-          <a:p>
-            <a:pPr algn="ctr"/>
-          </a:p>
-        </p:txBody>
-      </p:sp>
-      <p:sp>
-        <p:nvSpPr>
-          <p:cNvPr id="3" name="TextBox 2"/>
-          <p:cNvSpPr txBox="1"/>
-          <p:nvPr/>
-        </p:nvSpPr>
-        <p:spPr>
-          <a:xfrm>
-            <a:off x="896112" y="393192"/>
-            <a:ext cx="5486400" cy="365760"/>
-          </a:xfrm>
-          <a:prstGeom prst="rect">
-            <a:avLst/>
-          </a:prstGeom>
-          <a:noFill/>
-        </p:spPr>
-        <p:txBody>
-          <a:bodyPr wrap="square" anchor="t" lIns="0" rIns="0" tIns="0" bIns="0">
-            <a:spAutoFit/>
-          </a:bodyPr>
-          <a:lstStyle/>
-          <a:p>
-            <a:pPr algn="l"/>
-            <a:r>
-              <a:rPr sz="1600" b="1" i="0">
-                <a:solidFill>
-                  <a:srgbClr val="0F9E8E"/>
-                </a:solidFill>
-                <a:latin typeface="Noto Sans CJK JP"/>
-                <a:ea typeface="Noto Sans CJK JP"/>
-              </a:rPr>
-              <a:t>Appendix 3</a:t>
-            </a:r>
-          </a:p>
-        </p:txBody>
-      </p:sp>
-      <p:sp>
-        <p:nvSpPr>
-          <p:cNvPr id="4" name="TextBox 3"/>
-          <p:cNvSpPr txBox="1"/>
-          <p:nvPr/>
-        </p:nvSpPr>
-        <p:spPr>
-          <a:xfrm>
-            <a:off x="640080" y="822960"/>
-            <a:ext cx="10972800" cy="640080"/>
-          </a:xfrm>
-          <a:prstGeom prst="rect">
-            <a:avLst/>
-          </a:prstGeom>
-          <a:noFill/>
-        </p:spPr>
-        <p:txBody>
-          <a:bodyPr wrap="square" anchor="t" lIns="0" rIns="0" tIns="0" bIns="0">
-            <a:spAutoFit/>
-          </a:bodyPr>
-          <a:lstStyle/>
-          <a:p>
-            <a:pPr algn="l"/>
-            <a:r>
-              <a:rPr sz="2600" b="1" i="0">
-                <a:solidFill>
-                  <a:srgbClr val="1A2238"/>
-                </a:solidFill>
-                <a:latin typeface="Noto Sans CJK JP"/>
-                <a:ea typeface="Noto Sans CJK JP"/>
-              </a:rPr>
-              <a:t>Common early stumbling points (1/2)</a:t>
-            </a:r>
-          </a:p>
-        </p:txBody>
-      </p:sp>
-      <p:sp>
-        <p:nvSpPr>
-          <p:cNvPr id="5" name="Rectangle 4"/>
-          <p:cNvSpPr/>
-          <p:nvPr/>
-        </p:nvSpPr>
-        <p:spPr>
-          <a:xfrm>
-            <a:off x="640080" y="1554480"/>
-            <a:ext cx="502920" cy="502920"/>
-          </a:xfrm>
-          <a:prstGeom prst="rect">
-            <a:avLst/>
-          </a:prstGeom>
-          <a:solidFill>
-            <a:srgbClr val="0F9E8E"/>
-          </a:solidFill>
-          <a:ln>
-            <a:noFill/>
-          </a:ln>
-          <a:effectLst/>
-        </p:spPr>
-        <p:style>
-          <a:lnRef idx="1">
-            <a:schemeClr val="accent1"/>
-          </a:lnRef>
-          <a:fillRef idx="3">
-            <a:schemeClr val="accent1"/>
-          </a:fillRef>
-          <a:effectRef idx="2">
-            <a:schemeClr val="accent1"/>
-          </a:effectRef>
-          <a:fontRef idx="minor">
-            <a:schemeClr val="lt1"/>
-          </a:fontRef>
-        </p:style>
-        <p:txBody>
-          <a:bodyPr rtlCol="0" anchor="ctr"/>
-          <a:lstStyle/>
-          <a:p>
-            <a:pPr algn="ctr"/>
-          </a:p>
-        </p:txBody>
-      </p:sp>
-      <p:sp>
-        <p:nvSpPr>
-          <p:cNvPr id="6" name="TextBox 5"/>
-          <p:cNvSpPr txBox="1"/>
-          <p:nvPr/>
-        </p:nvSpPr>
-        <p:spPr>
-          <a:xfrm>
-            <a:off x="640080" y="1554480"/>
-            <a:ext cx="502920" cy="502920"/>
-          </a:xfrm>
-          <a:prstGeom prst="rect">
-            <a:avLst/>
-          </a:prstGeom>
-          <a:noFill/>
-        </p:spPr>
-        <p:txBody>
-          <a:bodyPr wrap="square" anchor="ctr" lIns="0" rIns="0" tIns="0" bIns="0">
-            <a:spAutoFit/>
-          </a:bodyPr>
-          <a:lstStyle/>
-          <a:p>
-            <a:pPr algn="ctr"/>
-            <a:r>
-              <a:rPr sz="2200" b="1" i="0">
-                <a:solidFill>
-                  <a:srgbClr val="FFFFFF"/>
-                </a:solidFill>
-                <a:latin typeface="Noto Sans CJK JP"/>
-                <a:ea typeface="Noto Sans CJK JP"/>
-              </a:rPr>
-              <a:t>1</a:t>
-            </a:r>
-          </a:p>
-        </p:txBody>
-      </p:sp>
-      <p:sp>
-        <p:nvSpPr>
-          <p:cNvPr id="7" name="TextBox 6"/>
-          <p:cNvSpPr txBox="1"/>
-          <p:nvPr/>
-        </p:nvSpPr>
-        <p:spPr>
-          <a:xfrm>
-            <a:off x="1325880" y="1536192"/>
-            <a:ext cx="10058400" cy="411480"/>
-          </a:xfrm>
-          <a:prstGeom prst="rect">
-            <a:avLst/>
-          </a:prstGeom>
-          <a:noFill/>
-        </p:spPr>
-        <p:txBody>
-          <a:bodyPr wrap="square" anchor="ctr" lIns="0" rIns="0" tIns="0" bIns="0">
-            <a:spAutoFit/>
-          </a:bodyPr>
-          <a:lstStyle/>
-          <a:p>
-            <a:pPr algn="l"/>
-            <a:r>
-              <a:rPr sz="1600" b="1" i="0">
-                <a:solidFill>
-                  <a:srgbClr val="1A2238"/>
-                </a:solidFill>
-                <a:latin typeface="Noto Sans CJK JP"/>
-                <a:ea typeface="Noto Sans CJK JP"/>
-              </a:rPr>
-              <a:t>Roots are not missing — they may just be inexpressible by radicals</a:t>
-            </a:r>
-            <a:r>
-              <a:rPr sz="1200" b="0" i="0">
-                <a:solidFill>
-                  <a:srgbClr val="0F9E8E"/>
-                </a:solidFill>
-                <a:latin typeface="Noto Sans CJK JP"/>
-                <a:ea typeface="Noto Sans CJK JP"/>
-              </a:rPr>
-              <a:t>   (main → P9)</a:t>
-            </a:r>
-          </a:p>
-        </p:txBody>
-      </p:sp>
-      <p:sp>
-        <p:nvSpPr>
-          <p:cNvPr id="8" name="TextBox 7"/>
-          <p:cNvSpPr txBox="1"/>
-          <p:nvPr/>
-        </p:nvSpPr>
-        <p:spPr>
-          <a:xfrm>
-            <a:off x="1325880" y="2011680"/>
-            <a:ext cx="10058400" cy="1097280"/>
-          </a:xfrm>
-          <a:prstGeom prst="rect">
-            <a:avLst/>
-          </a:prstGeom>
-          <a:noFill/>
-        </p:spPr>
-        <p:txBody>
-          <a:bodyPr wrap="square" lIns="0" rIns="0" tIns="0" bIns="0">
-            <a:spAutoFit/>
-          </a:bodyPr>
-          <a:lstStyle/>
-          <a:p>
-            <a:pPr>
-              <a:lnSpc>
-                <a:spcPct val="118000"/>
-              </a:lnSpc>
-            </a:pPr>
-            <a:r>
-              <a:rPr sz="1300" b="0">
-                <a:solidFill>
-                  <a:srgbClr val="5A6072"/>
-                </a:solidFill>
-                <a:latin typeface="Noto Sans CJK JP"/>
-                <a:ea typeface="Noto Sans CJK JP"/>
-              </a:rPr>
-              <a:t>For degree ≥ 5, roots always exist if we allow complex numbers. The question is not whether roots exist, but whether they can be written using only </a:t>
-            </a:r>
-            <a:r>
-              <a:rPr sz="1300" b="1">
-                <a:solidFill>
-                  <a:srgbClr val="1A2238"/>
-                </a:solidFill>
-                <a:latin typeface="Noto Sans CJK JP"/>
-                <a:ea typeface="Noto Sans CJK JP"/>
-              </a:rPr>
-              <a:t>the four operations and radicals</a:t>
-            </a:r>
-            <a:r>
-              <a:rPr sz="1300" b="0">
-                <a:solidFill>
-                  <a:srgbClr val="5A6072"/>
-                </a:solidFill>
-                <a:latin typeface="Noto Sans CJK JP"/>
-                <a:ea typeface="Noto Sans CJK JP"/>
-              </a:rPr>
-              <a:t>.</a:t>
-            </a:r>
-          </a:p>
-          <a:p>
-            <a:pPr>
-              <a:lnSpc>
-                <a:spcPct val="118000"/>
-              </a:lnSpc>
-            </a:pPr>
-            <a:r>
-              <a:rPr sz="1300" b="0">
-                <a:solidFill>
-                  <a:srgbClr val="5A6072"/>
-                </a:solidFill>
-                <a:latin typeface="Noto Sans CJK JP"/>
-                <a:ea typeface="Noto Sans CJK JP"/>
-              </a:rPr>
-              <a:t>"No solution formula" does not mean there are no roots — it means no uniform procedure expresses the roots by radicals alone.</a:t>
-            </a:r>
-          </a:p>
-        </p:txBody>
-      </p:sp>
-      <p:sp>
-        <p:nvSpPr>
-          <p:cNvPr id="9" name="Rectangle 8"/>
-          <p:cNvSpPr/>
-          <p:nvPr/>
-        </p:nvSpPr>
-        <p:spPr>
-          <a:xfrm>
-            <a:off x="640080" y="3108960"/>
-            <a:ext cx="502920" cy="502920"/>
-          </a:xfrm>
-          <a:prstGeom prst="rect">
-            <a:avLst/>
-          </a:prstGeom>
-          <a:solidFill>
-            <a:srgbClr val="0F9E8E"/>
-          </a:solidFill>
-          <a:ln>
-            <a:noFill/>
-          </a:ln>
-          <a:effectLst/>
-        </p:spPr>
-        <p:style>
-          <a:lnRef idx="1">
-            <a:schemeClr val="accent1"/>
-          </a:lnRef>
-          <a:fillRef idx="3">
-            <a:schemeClr val="accent1"/>
-          </a:fillRef>
-          <a:effectRef idx="2">
-            <a:schemeClr val="accent1"/>
-          </a:effectRef>
-          <a:fontRef idx="minor">
-            <a:schemeClr val="lt1"/>
-          </a:fontRef>
-        </p:style>
-        <p:txBody>
-          <a:bodyPr rtlCol="0" anchor="ctr"/>
-          <a:lstStyle/>
-          <a:p>
-            <a:pPr algn="ctr"/>
-          </a:p>
-        </p:txBody>
-      </p:sp>
-      <p:sp>
-        <p:nvSpPr>
-          <p:cNvPr id="10" name="TextBox 9"/>
-          <p:cNvSpPr txBox="1"/>
-          <p:nvPr/>
-        </p:nvSpPr>
-        <p:spPr>
-          <a:xfrm>
-            <a:off x="640080" y="3108960"/>
-            <a:ext cx="502920" cy="502920"/>
-          </a:xfrm>
-          <a:prstGeom prst="rect">
-            <a:avLst/>
-          </a:prstGeom>
-          <a:noFill/>
-        </p:spPr>
-        <p:txBody>
-          <a:bodyPr wrap="square" anchor="ctr" lIns="0" rIns="0" tIns="0" bIns="0">
-            <a:spAutoFit/>
-          </a:bodyPr>
-          <a:lstStyle/>
-          <a:p>
-            <a:pPr algn="ctr"/>
-            <a:r>
-              <a:rPr sz="2200" b="1" i="0">
-                <a:solidFill>
-                  <a:srgbClr val="FFFFFF"/>
-                </a:solidFill>
-                <a:latin typeface="Noto Sans CJK JP"/>
-                <a:ea typeface="Noto Sans CJK JP"/>
-              </a:rPr>
-              <a:t>2</a:t>
-            </a:r>
-          </a:p>
-        </p:txBody>
-      </p:sp>
-      <p:sp>
-        <p:nvSpPr>
-          <p:cNvPr id="11" name="TextBox 10"/>
-          <p:cNvSpPr txBox="1"/>
-          <p:nvPr/>
-        </p:nvSpPr>
-        <p:spPr>
-          <a:xfrm>
-            <a:off x="1325880" y="3090672"/>
-            <a:ext cx="10058400" cy="411480"/>
-          </a:xfrm>
-          <a:prstGeom prst="rect">
-            <a:avLst/>
-          </a:prstGeom>
-          <a:noFill/>
-        </p:spPr>
-        <p:txBody>
-          <a:bodyPr wrap="square" anchor="ctr" lIns="0" rIns="0" tIns="0" bIns="0">
-            <a:spAutoFit/>
-          </a:bodyPr>
-          <a:lstStyle/>
-          <a:p>
-            <a:pPr algn="l"/>
-            <a:r>
-              <a:rPr sz="1600" b="1" i="0">
-                <a:solidFill>
-                  <a:srgbClr val="1A2238"/>
-                </a:solidFill>
-                <a:latin typeface="Noto Sans CJK JP"/>
-                <a:ea typeface="Noto Sans CJK JP"/>
-              </a:rPr>
-              <a:t>Some individual quintics are solvable</a:t>
-            </a:r>
-            <a:r>
-              <a:rPr sz="1200" b="0" i="0">
-                <a:solidFill>
-                  <a:srgbClr val="0F9E8E"/>
-                </a:solidFill>
-                <a:latin typeface="Noto Sans CJK JP"/>
-                <a:ea typeface="Noto Sans CJK JP"/>
-              </a:rPr>
-              <a:t>   (main → P9)</a:t>
-            </a:r>
-          </a:p>
-        </p:txBody>
-      </p:sp>
-      <p:sp>
-        <p:nvSpPr>
-          <p:cNvPr id="12" name="TextBox 11"/>
-          <p:cNvSpPr txBox="1"/>
-          <p:nvPr/>
-        </p:nvSpPr>
-        <p:spPr>
-          <a:xfrm>
-            <a:off x="1325880" y="3566160"/>
-            <a:ext cx="10058400" cy="1097280"/>
-          </a:xfrm>
-          <a:prstGeom prst="rect">
-            <a:avLst/>
-          </a:prstGeom>
-          <a:noFill/>
-        </p:spPr>
-        <p:txBody>
-          <a:bodyPr wrap="square" lIns="0" rIns="0" tIns="0" bIns="0">
-            <a:spAutoFit/>
-          </a:bodyPr>
-          <a:lstStyle/>
-          <a:p>
-            <a:pPr>
-              <a:lnSpc>
-                <a:spcPct val="118000"/>
-              </a:lnSpc>
-            </a:pPr>
-            <a:r>
-              <a:rPr sz="1300" b="0">
-                <a:solidFill>
-                  <a:srgbClr val="5A6072"/>
-                </a:solidFill>
-                <a:latin typeface="Noto Sans CJK JP"/>
-                <a:ea typeface="Noto Sans CJK JP"/>
-              </a:rPr>
-              <a:t>"No formula for the quintic" does not mean every quintic is unsolvable. Some quintics are solvable by radicals (e.g. x⁵−1=0).</a:t>
-            </a:r>
-          </a:p>
-          <a:p>
-            <a:pPr>
-              <a:lnSpc>
-                <a:spcPct val="118000"/>
-              </a:lnSpc>
-            </a:pPr>
-            <a:r>
-              <a:rPr sz="1300" b="0">
-                <a:solidFill>
-                  <a:srgbClr val="5A6072"/>
-                </a:solidFill>
-                <a:latin typeface="Noto Sans CJK JP"/>
-                <a:ea typeface="Noto Sans CJK JP"/>
-              </a:rPr>
-              <a:t>The point is that for the </a:t>
-            </a:r>
-            <a:r>
-              <a:rPr sz="1300" b="1">
-                <a:solidFill>
-                  <a:srgbClr val="1A2238"/>
-                </a:solidFill>
-                <a:latin typeface="Noto Sans CJK JP"/>
-                <a:ea typeface="Noto Sans CJK JP"/>
-              </a:rPr>
-              <a:t>general quintic with literal coefficients</a:t>
-            </a:r>
-            <a:r>
-              <a:rPr sz="1300" b="0">
-                <a:solidFill>
-                  <a:srgbClr val="5A6072"/>
-                </a:solidFill>
-                <a:latin typeface="Noto Sans CJK JP"/>
-                <a:ea typeface="Noto Sans CJK JP"/>
-              </a:rPr>
-              <a:t>, no uniform formula in the four operations and radicals exists.</a:t>
-            </a:r>
-          </a:p>
-        </p:txBody>
-      </p:sp>
-      <p:sp>
-        <p:nvSpPr>
-          <p:cNvPr id="13" name="Rectangle 12"/>
-          <p:cNvSpPr/>
-          <p:nvPr/>
-        </p:nvSpPr>
-        <p:spPr>
-          <a:xfrm>
-            <a:off x="640080" y="4663440"/>
-            <a:ext cx="502920" cy="502920"/>
-          </a:xfrm>
-          <a:prstGeom prst="rect">
-            <a:avLst/>
-          </a:prstGeom>
-          <a:solidFill>
-            <a:srgbClr val="0F9E8E"/>
-          </a:solidFill>
-          <a:ln>
-            <a:noFill/>
-          </a:ln>
-          <a:effectLst/>
-        </p:spPr>
-        <p:style>
-          <a:lnRef idx="1">
-            <a:schemeClr val="accent1"/>
-          </a:lnRef>
-          <a:fillRef idx="3">
-            <a:schemeClr val="accent1"/>
-          </a:fillRef>
-          <a:effectRef idx="2">
-            <a:schemeClr val="accent1"/>
-          </a:effectRef>
-          <a:fontRef idx="minor">
-            <a:schemeClr val="lt1"/>
-          </a:fontRef>
-        </p:style>
-        <p:txBody>
-          <a:bodyPr rtlCol="0" anchor="ctr"/>
-          <a:lstStyle/>
-          <a:p>
-            <a:pPr algn="ctr"/>
-          </a:p>
-        </p:txBody>
-      </p:sp>
-      <p:sp>
-        <p:nvSpPr>
-          <p:cNvPr id="14" name="TextBox 13"/>
-          <p:cNvSpPr txBox="1"/>
-          <p:nvPr/>
-        </p:nvSpPr>
-        <p:spPr>
-          <a:xfrm>
-            <a:off x="640080" y="4663440"/>
-            <a:ext cx="502920" cy="502920"/>
-          </a:xfrm>
-          <a:prstGeom prst="rect">
-            <a:avLst/>
-          </a:prstGeom>
-          <a:noFill/>
-        </p:spPr>
-        <p:txBody>
-          <a:bodyPr wrap="square" anchor="ctr" lIns="0" rIns="0" tIns="0" bIns="0">
-            <a:spAutoFit/>
-          </a:bodyPr>
-          <a:lstStyle/>
-          <a:p>
-            <a:pPr algn="ctr"/>
-            <a:r>
-              <a:rPr sz="2200" b="1" i="0">
-                <a:solidFill>
-                  <a:srgbClr val="FFFFFF"/>
-                </a:solidFill>
-                <a:latin typeface="Noto Sans CJK JP"/>
-                <a:ea typeface="Noto Sans CJK JP"/>
-              </a:rPr>
-              <a:t>3</a:t>
-            </a:r>
-          </a:p>
-        </p:txBody>
-      </p:sp>
-      <p:sp>
-        <p:nvSpPr>
-          <p:cNvPr id="15" name="TextBox 14"/>
-          <p:cNvSpPr txBox="1"/>
-          <p:nvPr/>
-        </p:nvSpPr>
-        <p:spPr>
-          <a:xfrm>
-            <a:off x="1325880" y="4645152"/>
-            <a:ext cx="10058400" cy="411480"/>
-          </a:xfrm>
-          <a:prstGeom prst="rect">
-            <a:avLst/>
-          </a:prstGeom>
-          <a:noFill/>
-        </p:spPr>
-        <p:txBody>
-          <a:bodyPr wrap="square" anchor="ctr" lIns="0" rIns="0" tIns="0" bIns="0">
-            <a:spAutoFit/>
-          </a:bodyPr>
-          <a:lstStyle/>
-          <a:p>
-            <a:pPr algn="l"/>
-            <a:r>
-              <a:rPr sz="1600" b="1" i="0">
-                <a:solidFill>
-                  <a:srgbClr val="1A2238"/>
-                </a:solidFill>
-                <a:latin typeface="Noto Sans CJK JP"/>
-                <a:ea typeface="Noto Sans CJK JP"/>
-              </a:rPr>
-              <a:t>The Galois group is not all permutations of the roots</a:t>
-            </a:r>
-            <a:r>
-              <a:rPr sz="1200" b="0" i="0">
-                <a:solidFill>
-                  <a:srgbClr val="0F9E8E"/>
-                </a:solidFill>
-                <a:latin typeface="Noto Sans CJK JP"/>
-                <a:ea typeface="Noto Sans CJK JP"/>
-              </a:rPr>
-              <a:t>   (main → P3)</a:t>
-            </a:r>
-          </a:p>
-        </p:txBody>
-      </p:sp>
-      <p:sp>
-        <p:nvSpPr>
-          <p:cNvPr id="16" name="TextBox 15"/>
-          <p:cNvSpPr txBox="1"/>
-          <p:nvPr/>
-        </p:nvSpPr>
-        <p:spPr>
-          <a:xfrm>
-            <a:off x="1325880" y="5120640"/>
-            <a:ext cx="10058400" cy="1097280"/>
-          </a:xfrm>
-          <a:prstGeom prst="rect">
-            <a:avLst/>
-          </a:prstGeom>
-          <a:noFill/>
-        </p:spPr>
-        <p:txBody>
-          <a:bodyPr wrap="square" lIns="0" rIns="0" tIns="0" bIns="0">
-            <a:spAutoFit/>
-          </a:bodyPr>
-          <a:lstStyle/>
-          <a:p>
-            <a:pPr>
-              <a:lnSpc>
-                <a:spcPct val="118000"/>
-              </a:lnSpc>
-            </a:pPr>
-            <a:r>
-              <a:rPr sz="1300" b="0">
-                <a:solidFill>
-                  <a:srgbClr val="5A6072"/>
-                </a:solidFill>
-                <a:latin typeface="Noto Sans CJK JP"/>
-                <a:ea typeface="Noto Sans CJK JP"/>
-              </a:rPr>
-              <a:t>The Galois group is not every rearrangement of the roots, but only </a:t>
-            </a:r>
-            <a:r>
-              <a:rPr sz="1300" b="1">
-                <a:solidFill>
-                  <a:srgbClr val="1A2238"/>
-                </a:solidFill>
-                <a:latin typeface="Noto Sans CJK JP"/>
-                <a:ea typeface="Noto Sans CJK JP"/>
-              </a:rPr>
-              <a:t>the swaps that preserve the value of rational expressions built from the roots</a:t>
-            </a:r>
-            <a:r>
-              <a:rPr sz="1300" b="0">
-                <a:solidFill>
-                  <a:srgbClr val="5A6072"/>
-                </a:solidFill>
-                <a:latin typeface="Noto Sans CJK JP"/>
-                <a:ea typeface="Noto Sans CJK JP"/>
-              </a:rPr>
-              <a:t>.</a:t>
-            </a:r>
-          </a:p>
-          <a:p>
-            <a:pPr>
-              <a:lnSpc>
-                <a:spcPct val="118000"/>
-              </a:lnSpc>
-            </a:pPr>
-            <a:r>
-              <a:rPr sz="1300" b="0">
-                <a:solidFill>
-                  <a:srgbClr val="5A6072"/>
-                </a:solidFill>
-                <a:latin typeface="Noto Sans CJK JP"/>
-                <a:ea typeface="Noto Sans CJK JP"/>
-              </a:rPr>
-              <a:t>Roots indistinguishable from the rationals may be swapped, but swaps that break relations like sums or products are not allowed.</a:t>
-            </a:r>
-          </a:p>
-        </p:txBody>
-      </p:sp>
-      <p:sp>
-        <p:nvSpPr>
-          <p:cNvPr id="17" name="TextBox 16"/>
-          <p:cNvSpPr txBox="1"/>
-          <p:nvPr/>
-        </p:nvSpPr>
-        <p:spPr>
-          <a:xfrm>
-            <a:off x="11369040" y="6355080"/>
-            <a:ext cx="457200" cy="274320"/>
-          </a:xfrm>
-          <a:prstGeom prst="rect">
-            <a:avLst/>
-          </a:prstGeom>
-          <a:noFill/>
-        </p:spPr>
-        <p:txBody>
-          <a:bodyPr wrap="square" anchor="t" lIns="0" rIns="0" tIns="0" bIns="0">
-            <a:spAutoFit/>
-          </a:bodyPr>
-          <a:lstStyle/>
-          <a:p>
-            <a:pPr algn="r"/>
-            <a:r>
-              <a:rPr sz="1100" b="0" i="0">
-                <a:solidFill>
-                  <a:srgbClr val="6B7180"/>
-                </a:solidFill>
-                <a:latin typeface="Noto Sans CJK JP"/>
-                <a:ea typeface="Noto Sans CJK JP"/>
-              </a:rPr>
-              <a:t>17</a:t>
-            </a:r>
-          </a:p>
-        </p:txBody>
-      </p:sp>
-      <p:sp>
-        <p:nvSpPr>
-          <p:cNvPr id="18" name="TextBox 17"/>
-          <p:cNvSpPr txBox="1"/>
-          <p:nvPr/>
-        </p:nvSpPr>
-        <p:spPr>
-          <a:xfrm>
-            <a:off x="457200" y="6355080"/>
-            <a:ext cx="4572000" cy="274320"/>
-          </a:xfrm>
-          <a:prstGeom prst="rect">
-            <a:avLst/>
-          </a:prstGeom>
-          <a:noFill/>
-        </p:spPr>
-        <p:txBody>
-          <a:bodyPr wrap="square" anchor="t" lIns="0" rIns="0" tIns="0" bIns="0">
-            <a:spAutoFit/>
-          </a:bodyPr>
-          <a:lstStyle/>
-          <a:p>
-            <a:pPr algn="l"/>
-            <a:r>
-              <a:rPr sz="1000" b="0" i="0">
-                <a:solidFill>
-                  <a:srgbClr val="6B7180"/>
-                </a:solidFill>
-                <a:latin typeface="Noto Sans CJK JP"/>
-                <a:ea typeface="Noto Sans CJK JP"/>
-              </a:rPr>
-              <a:t>5garashi.com Design Office</a:t>
-            </a:r>
-          </a:p>
-        </p:txBody>
-      </p:sp>
-    </p:spTree>
-  </p:cSld>
-  <p:clrMapOvr>
-    <a:masterClrMapping/>
-  </p:clrMapOvr>
-</p:sld>
-</file>
-
-<file path=ppt/slides/slide17.xml><?xml version="1.0" encoding="utf-8"?>
-<p:sld xmlns:a="http://schemas.openxmlformats.org/drawingml/2006/main" xmlns:p="http://schemas.openxmlformats.org/presentationml/2006/main" xmlns:r="http://schemas.openxmlformats.org/officeDocument/2006/relationships">
-  <p:cSld>
-    <p:spTree>
-      <p:nvGrpSpPr>
-        <p:cNvPr id="1" name=""/>
-        <p:cNvGrpSpPr/>
-        <p:nvPr/>
-      </p:nvGrpSpPr>
-      <p:grpSpPr/>
-      <p:sp>
-        <p:nvSpPr>
-          <p:cNvPr id="2" name="Oval 1"/>
-          <p:cNvSpPr/>
-          <p:nvPr/>
-        </p:nvSpPr>
-        <p:spPr>
-          <a:xfrm>
-            <a:off x="640080" y="502920"/>
-            <a:ext cx="146304" cy="146304"/>
-          </a:xfrm>
-          <a:prstGeom prst="ellipse">
-            <a:avLst/>
-          </a:prstGeom>
-          <a:solidFill>
-            <a:srgbClr val="0F9E8E"/>
-          </a:solidFill>
-          <a:ln>
-            <a:noFill/>
-          </a:ln>
-          <a:effectLst/>
-        </p:spPr>
-        <p:style>
-          <a:lnRef idx="1">
-            <a:schemeClr val="accent1"/>
-          </a:lnRef>
-          <a:fillRef idx="3">
-            <a:schemeClr val="accent1"/>
-          </a:fillRef>
-          <a:effectRef idx="2">
-            <a:schemeClr val="accent1"/>
-          </a:effectRef>
-          <a:fontRef idx="minor">
-            <a:schemeClr val="lt1"/>
-          </a:fontRef>
-        </p:style>
-        <p:txBody>
-          <a:bodyPr rtlCol="0" anchor="ctr"/>
-          <a:lstStyle/>
-          <a:p>
-            <a:pPr algn="ctr"/>
-          </a:p>
-        </p:txBody>
-      </p:sp>
-      <p:sp>
-        <p:nvSpPr>
-          <p:cNvPr id="3" name="TextBox 2"/>
-          <p:cNvSpPr txBox="1"/>
-          <p:nvPr/>
-        </p:nvSpPr>
-        <p:spPr>
-          <a:xfrm>
-            <a:off x="896112" y="393192"/>
-            <a:ext cx="5486400" cy="365760"/>
-          </a:xfrm>
-          <a:prstGeom prst="rect">
-            <a:avLst/>
-          </a:prstGeom>
-          <a:noFill/>
-        </p:spPr>
-        <p:txBody>
-          <a:bodyPr wrap="square" anchor="t" lIns="0" rIns="0" tIns="0" bIns="0">
-            <a:spAutoFit/>
-          </a:bodyPr>
-          <a:lstStyle/>
-          <a:p>
-            <a:pPr algn="l"/>
-            <a:r>
-              <a:rPr sz="1600" b="1" i="0">
-                <a:solidFill>
-                  <a:srgbClr val="0F9E8E"/>
-                </a:solidFill>
-                <a:latin typeface="Noto Sans CJK JP"/>
-                <a:ea typeface="Noto Sans CJK JP"/>
-              </a:rPr>
-              <a:t>Appendix 3</a:t>
-            </a:r>
-          </a:p>
-        </p:txBody>
-      </p:sp>
-      <p:sp>
-        <p:nvSpPr>
-          <p:cNvPr id="4" name="TextBox 3"/>
-          <p:cNvSpPr txBox="1"/>
-          <p:nvPr/>
-        </p:nvSpPr>
-        <p:spPr>
-          <a:xfrm>
-            <a:off x="640080" y="822960"/>
-            <a:ext cx="10972800" cy="640080"/>
-          </a:xfrm>
-          <a:prstGeom prst="rect">
-            <a:avLst/>
-          </a:prstGeom>
-          <a:noFill/>
-        </p:spPr>
-        <p:txBody>
-          <a:bodyPr wrap="square" anchor="t" lIns="0" rIns="0" tIns="0" bIns="0">
-            <a:spAutoFit/>
-          </a:bodyPr>
-          <a:lstStyle/>
-          <a:p>
-            <a:pPr algn="l"/>
-            <a:r>
-              <a:rPr sz="2600" b="1" i="0">
-                <a:solidFill>
-                  <a:srgbClr val="1A2238"/>
-                </a:solidFill>
-                <a:latin typeface="Noto Sans CJK JP"/>
-                <a:ea typeface="Noto Sans CJK JP"/>
-              </a:rPr>
-              <a:t>Common early stumbling points (2/2)</a:t>
-            </a:r>
-          </a:p>
-        </p:txBody>
-      </p:sp>
-      <p:sp>
-        <p:nvSpPr>
-          <p:cNvPr id="5" name="Rectangle 4"/>
-          <p:cNvSpPr/>
-          <p:nvPr/>
-        </p:nvSpPr>
-        <p:spPr>
-          <a:xfrm>
-            <a:off x="640080" y="1554480"/>
-            <a:ext cx="502920" cy="502920"/>
-          </a:xfrm>
-          <a:prstGeom prst="rect">
-            <a:avLst/>
-          </a:prstGeom>
-          <a:solidFill>
-            <a:srgbClr val="0F9E8E"/>
-          </a:solidFill>
-          <a:ln>
-            <a:noFill/>
-          </a:ln>
-          <a:effectLst/>
-        </p:spPr>
-        <p:style>
-          <a:lnRef idx="1">
-            <a:schemeClr val="accent1"/>
-          </a:lnRef>
-          <a:fillRef idx="3">
-            <a:schemeClr val="accent1"/>
-          </a:fillRef>
-          <a:effectRef idx="2">
-            <a:schemeClr val="accent1"/>
-          </a:effectRef>
-          <a:fontRef idx="minor">
-            <a:schemeClr val="lt1"/>
-          </a:fontRef>
-        </p:style>
-        <p:txBody>
-          <a:bodyPr rtlCol="0" anchor="ctr"/>
-          <a:lstStyle/>
-          <a:p>
-            <a:pPr algn="ctr"/>
-          </a:p>
-        </p:txBody>
-      </p:sp>
-      <p:sp>
-        <p:nvSpPr>
-          <p:cNvPr id="6" name="TextBox 5"/>
-          <p:cNvSpPr txBox="1"/>
-          <p:nvPr/>
-        </p:nvSpPr>
-        <p:spPr>
-          <a:xfrm>
-            <a:off x="640080" y="1554480"/>
-            <a:ext cx="502920" cy="502920"/>
-          </a:xfrm>
-          <a:prstGeom prst="rect">
-            <a:avLst/>
-          </a:prstGeom>
-          <a:noFill/>
-        </p:spPr>
-        <p:txBody>
-          <a:bodyPr wrap="square" anchor="ctr" lIns="0" rIns="0" tIns="0" bIns="0">
-            <a:spAutoFit/>
-          </a:bodyPr>
-          <a:lstStyle/>
-          <a:p>
-            <a:pPr algn="ctr"/>
-            <a:r>
-              <a:rPr sz="2200" b="1" i="0">
-                <a:solidFill>
-                  <a:srgbClr val="FFFFFF"/>
-                </a:solidFill>
-                <a:latin typeface="Noto Sans CJK JP"/>
-                <a:ea typeface="Noto Sans CJK JP"/>
-              </a:rPr>
-              <a:t>4</a:t>
-            </a:r>
-          </a:p>
-        </p:txBody>
-      </p:sp>
-      <p:sp>
-        <p:nvSpPr>
-          <p:cNvPr id="7" name="TextBox 6"/>
-          <p:cNvSpPr txBox="1"/>
-          <p:nvPr/>
-        </p:nvSpPr>
-        <p:spPr>
-          <a:xfrm>
-            <a:off x="1325880" y="1536192"/>
-            <a:ext cx="10058400" cy="411480"/>
-          </a:xfrm>
-          <a:prstGeom prst="rect">
-            <a:avLst/>
-          </a:prstGeom>
-          <a:noFill/>
-        </p:spPr>
-        <p:txBody>
-          <a:bodyPr wrap="square" anchor="ctr" lIns="0" rIns="0" tIns="0" bIns="0">
-            <a:spAutoFit/>
-          </a:bodyPr>
-          <a:lstStyle/>
-          <a:p>
-            <a:pPr algn="l"/>
-            <a:r>
-              <a:rPr sz="1600" b="1" i="0">
-                <a:solidFill>
-                  <a:srgbClr val="1A2238"/>
-                </a:solidFill>
-                <a:latin typeface="Noto Sans CJK JP"/>
-                <a:ea typeface="Noto Sans CJK JP"/>
-              </a:rPr>
-              <a:t>"The group shrinks" means fewer allowed swaps</a:t>
-            </a:r>
-            <a:r>
-              <a:rPr sz="1200" b="0" i="0">
-                <a:solidFill>
-                  <a:srgbClr val="0F9E8E"/>
-                </a:solidFill>
-                <a:latin typeface="Noto Sans CJK JP"/>
-                <a:ea typeface="Noto Sans CJK JP"/>
-              </a:rPr>
-              <a:t>   (main → P4)</a:t>
-            </a:r>
-          </a:p>
-        </p:txBody>
-      </p:sp>
-      <p:sp>
-        <p:nvSpPr>
-          <p:cNvPr id="8" name="TextBox 7"/>
-          <p:cNvSpPr txBox="1"/>
-          <p:nvPr/>
-        </p:nvSpPr>
-        <p:spPr>
-          <a:xfrm>
-            <a:off x="1325880" y="2011680"/>
-            <a:ext cx="10058400" cy="1097280"/>
-          </a:xfrm>
-          <a:prstGeom prst="rect">
-            <a:avLst/>
-          </a:prstGeom>
-          <a:noFill/>
-        </p:spPr>
-        <p:txBody>
-          <a:bodyPr wrap="square" lIns="0" rIns="0" tIns="0" bIns="0">
-            <a:spAutoFit/>
-          </a:bodyPr>
-          <a:lstStyle/>
-          <a:p>
-            <a:pPr>
-              <a:lnSpc>
-                <a:spcPct val="118000"/>
-              </a:lnSpc>
-            </a:pPr>
-            <a:r>
-              <a:rPr sz="1300" b="0">
-                <a:solidFill>
-                  <a:srgbClr val="5A6072"/>
-                </a:solidFill>
-                <a:latin typeface="Noto Sans CJK JP"/>
-                <a:ea typeface="Noto Sans CJK JP"/>
-              </a:rPr>
-              <a:t>Adjoining a new element to the field makes previously indistinguishable numbers distinguishable, so fewer swaps are allowed.</a:t>
-            </a:r>
-          </a:p>
-          <a:p>
-            <a:pPr>
-              <a:lnSpc>
-                <a:spcPct val="118000"/>
-              </a:lnSpc>
-            </a:pPr>
-            <a:r>
-              <a:rPr sz="1300" b="0">
-                <a:solidFill>
-                  <a:srgbClr val="1A2238"/>
-                </a:solidFill>
-                <a:latin typeface="Noto Sans CJK JP"/>
-                <a:ea typeface="Noto Sans CJK JP"/>
-              </a:rPr>
-              <a:t>field grows → more known numbers → more numbers to fix → fewer allowed swaps → the Galois group shrinks.</a:t>
-            </a:r>
-          </a:p>
-        </p:txBody>
-      </p:sp>
-      <p:sp>
-        <p:nvSpPr>
-          <p:cNvPr id="9" name="Rectangle 8"/>
-          <p:cNvSpPr/>
-          <p:nvPr/>
-        </p:nvSpPr>
-        <p:spPr>
-          <a:xfrm>
-            <a:off x="640080" y="3108960"/>
-            <a:ext cx="502920" cy="502920"/>
-          </a:xfrm>
-          <a:prstGeom prst="rect">
-            <a:avLst/>
-          </a:prstGeom>
-          <a:solidFill>
-            <a:srgbClr val="0F9E8E"/>
-          </a:solidFill>
-          <a:ln>
-            <a:noFill/>
-          </a:ln>
-          <a:effectLst/>
-        </p:spPr>
-        <p:style>
-          <a:lnRef idx="1">
-            <a:schemeClr val="accent1"/>
-          </a:lnRef>
-          <a:fillRef idx="3">
-            <a:schemeClr val="accent1"/>
-          </a:fillRef>
-          <a:effectRef idx="2">
-            <a:schemeClr val="accent1"/>
-          </a:effectRef>
-          <a:fontRef idx="minor">
-            <a:schemeClr val="lt1"/>
-          </a:fontRef>
-        </p:style>
-        <p:txBody>
-          <a:bodyPr rtlCol="0" anchor="ctr"/>
-          <a:lstStyle/>
-          <a:p>
-            <a:pPr algn="ctr"/>
-          </a:p>
-        </p:txBody>
-      </p:sp>
-      <p:sp>
-        <p:nvSpPr>
-          <p:cNvPr id="10" name="TextBox 9"/>
-          <p:cNvSpPr txBox="1"/>
-          <p:nvPr/>
-        </p:nvSpPr>
-        <p:spPr>
-          <a:xfrm>
-            <a:off x="640080" y="3108960"/>
-            <a:ext cx="502920" cy="502920"/>
-          </a:xfrm>
-          <a:prstGeom prst="rect">
-            <a:avLst/>
-          </a:prstGeom>
-          <a:noFill/>
-        </p:spPr>
-        <p:txBody>
-          <a:bodyPr wrap="square" anchor="ctr" lIns="0" rIns="0" tIns="0" bIns="0">
-            <a:spAutoFit/>
-          </a:bodyPr>
-          <a:lstStyle/>
-          <a:p>
-            <a:pPr algn="ctr"/>
-            <a:r>
-              <a:rPr sz="2200" b="1" i="0">
-                <a:solidFill>
-                  <a:srgbClr val="FFFFFF"/>
-                </a:solidFill>
-                <a:latin typeface="Noto Sans CJK JP"/>
-                <a:ea typeface="Noto Sans CJK JP"/>
-              </a:rPr>
-              <a:t>5</a:t>
-            </a:r>
-          </a:p>
-        </p:txBody>
-      </p:sp>
-      <p:sp>
-        <p:nvSpPr>
-          <p:cNvPr id="11" name="TextBox 10"/>
-          <p:cNvSpPr txBox="1"/>
-          <p:nvPr/>
-        </p:nvSpPr>
-        <p:spPr>
-          <a:xfrm>
-            <a:off x="1325880" y="3090672"/>
-            <a:ext cx="10058400" cy="411480"/>
-          </a:xfrm>
-          <a:prstGeom prst="rect">
-            <a:avLst/>
-          </a:prstGeom>
-          <a:noFill/>
-        </p:spPr>
-        <p:txBody>
-          <a:bodyPr wrap="square" anchor="ctr" lIns="0" rIns="0" tIns="0" bIns="0">
-            <a:spAutoFit/>
-          </a:bodyPr>
-          <a:lstStyle/>
-          <a:p>
-            <a:pPr algn="l"/>
-            <a:r>
-              <a:rPr sz="1600" b="1" i="0">
-                <a:solidFill>
-                  <a:srgbClr val="1A2238"/>
-                </a:solidFill>
-                <a:latin typeface="Noto Sans CJK JP"/>
-                <a:ea typeface="Noto Sans CJK JP"/>
-              </a:rPr>
-              <a:t>The quotient’s order corresponds to which n-th root is adjoined</a:t>
-            </a:r>
-            <a:r>
-              <a:rPr sz="1200" b="0" i="0">
-                <a:solidFill>
-                  <a:srgbClr val="0F9E8E"/>
-                </a:solidFill>
-                <a:latin typeface="Noto Sans CJK JP"/>
-                <a:ea typeface="Noto Sans CJK JP"/>
-              </a:rPr>
-              <a:t>   (main → P4 ・ App.2 P15)</a:t>
-            </a:r>
-          </a:p>
-        </p:txBody>
-      </p:sp>
-      <p:sp>
-        <p:nvSpPr>
-          <p:cNvPr id="12" name="TextBox 11"/>
-          <p:cNvSpPr txBox="1"/>
-          <p:nvPr/>
-        </p:nvSpPr>
-        <p:spPr>
-          <a:xfrm>
-            <a:off x="1325880" y="3566160"/>
-            <a:ext cx="10058400" cy="1097280"/>
-          </a:xfrm>
-          <a:prstGeom prst="rect">
-            <a:avLst/>
-          </a:prstGeom>
-          <a:noFill/>
-        </p:spPr>
-        <p:txBody>
-          <a:bodyPr wrap="square" lIns="0" rIns="0" tIns="0" bIns="0">
-            <a:spAutoFit/>
-          </a:bodyPr>
-          <a:lstStyle/>
-          <a:p>
-            <a:pPr>
-              <a:lnSpc>
-                <a:spcPct val="105000"/>
-              </a:lnSpc>
-            </a:pPr>
-            <a:r>
-              <a:rPr sz="1200">
-                <a:solidFill>
-                  <a:srgbClr val="1A2238"/>
-                </a:solidFill>
-                <a:latin typeface="Noto Sans CJK JP"/>
-                <a:ea typeface="Noto Sans CJK JP"/>
-              </a:rPr>
-              <a:t>The quotient’s order equals the number of permutation steps to cycle once through the radical’s conjugate candidates and return.</a:t>
-            </a:r>
-          </a:p>
-          <a:p>
-            <a:pPr>
-              <a:lnSpc>
-                <a:spcPct val="105000"/>
-              </a:lnSpc>
-            </a:pPr>
-            <a:r>
-              <a:rPr sz="1200">
-                <a:solidFill>
-                  <a:srgbClr val="1A2238"/>
-                </a:solidFill>
-                <a:latin typeface="Noto Sans CJK JP"/>
-                <a:ea typeface="Noto Sans CJK JP"/>
-              </a:rPr>
-              <a:t>For a square root the candidates are √a, −√a (2 of them): √a → −√a → √a returns after 2 steps.</a:t>
-            </a:r>
-          </a:p>
-          <a:p>
-            <a:pPr>
-              <a:lnSpc>
-                <a:spcPct val="105000"/>
-              </a:lnSpc>
-            </a:pPr>
-            <a:r>
-              <a:rPr sz="1200">
-                <a:solidFill>
-                  <a:srgbClr val="1A2238"/>
-                </a:solidFill>
-                <a:latin typeface="Noto Sans CJK JP"/>
-                <a:ea typeface="Noto Sans CJK JP"/>
-              </a:rPr>
-              <a:t>For a cube root the candidates are ³√a, ω³√a, ω²³√a (3 of them): ³√a → ω³√a → ω²³√a → ³√a returns after 3 steps.</a:t>
-            </a:r>
-          </a:p>
-        </p:txBody>
-      </p:sp>
-      <p:sp>
-        <p:nvSpPr>
-          <p:cNvPr id="13" name="Rectangle 12"/>
-          <p:cNvSpPr/>
-          <p:nvPr/>
-        </p:nvSpPr>
-        <p:spPr>
-          <a:xfrm>
-            <a:off x="640080" y="4663440"/>
-            <a:ext cx="502920" cy="502920"/>
-          </a:xfrm>
-          <a:prstGeom prst="rect">
-            <a:avLst/>
-          </a:prstGeom>
-          <a:solidFill>
-            <a:srgbClr val="0F9E8E"/>
-          </a:solidFill>
-          <a:ln>
-            <a:noFill/>
-          </a:ln>
-          <a:effectLst/>
-        </p:spPr>
-        <p:style>
-          <a:lnRef idx="1">
-            <a:schemeClr val="accent1"/>
-          </a:lnRef>
-          <a:fillRef idx="3">
-            <a:schemeClr val="accent1"/>
-          </a:fillRef>
-          <a:effectRef idx="2">
-            <a:schemeClr val="accent1"/>
-          </a:effectRef>
-          <a:fontRef idx="minor">
-            <a:schemeClr val="lt1"/>
-          </a:fontRef>
-        </p:style>
-        <p:txBody>
-          <a:bodyPr rtlCol="0" anchor="ctr"/>
-          <a:lstStyle/>
-          <a:p>
-            <a:pPr algn="ctr"/>
-          </a:p>
-        </p:txBody>
-      </p:sp>
-      <p:sp>
-        <p:nvSpPr>
-          <p:cNvPr id="14" name="TextBox 13"/>
-          <p:cNvSpPr txBox="1"/>
-          <p:nvPr/>
-        </p:nvSpPr>
-        <p:spPr>
-          <a:xfrm>
-            <a:off x="640080" y="4663440"/>
-            <a:ext cx="502920" cy="502920"/>
-          </a:xfrm>
-          <a:prstGeom prst="rect">
-            <a:avLst/>
-          </a:prstGeom>
-          <a:noFill/>
-        </p:spPr>
-        <p:txBody>
-          <a:bodyPr wrap="square" anchor="ctr" lIns="0" rIns="0" tIns="0" bIns="0">
-            <a:spAutoFit/>
-          </a:bodyPr>
-          <a:lstStyle/>
-          <a:p>
-            <a:pPr algn="ctr"/>
-            <a:r>
-              <a:rPr sz="2200" b="1" i="0">
-                <a:solidFill>
-                  <a:srgbClr val="FFFFFF"/>
-                </a:solidFill>
-                <a:latin typeface="Noto Sans CJK JP"/>
-                <a:ea typeface="Noto Sans CJK JP"/>
-              </a:rPr>
-              <a:t>6</a:t>
-            </a:r>
-          </a:p>
-        </p:txBody>
-      </p:sp>
-      <p:sp>
-        <p:nvSpPr>
-          <p:cNvPr id="15" name="TextBox 14"/>
-          <p:cNvSpPr txBox="1"/>
-          <p:nvPr/>
-        </p:nvSpPr>
-        <p:spPr>
-          <a:xfrm>
-            <a:off x="1325880" y="4645152"/>
-            <a:ext cx="10058400" cy="411480"/>
-          </a:xfrm>
-          <a:prstGeom prst="rect">
-            <a:avLst/>
-          </a:prstGeom>
-          <a:noFill/>
-        </p:spPr>
-        <p:txBody>
-          <a:bodyPr wrap="square" anchor="ctr" lIns="0" rIns="0" tIns="0" bIns="0">
-            <a:spAutoFit/>
-          </a:bodyPr>
-          <a:lstStyle/>
-          <a:p>
-            <a:pPr algn="l"/>
-            <a:r>
-              <a:rPr sz="1600" b="1" i="0">
-                <a:solidFill>
-                  <a:srgbClr val="1A2238"/>
-                </a:solidFill>
-                <a:latin typeface="Noto Sans CJK JP"/>
-                <a:ea typeface="Noto Sans CJK JP"/>
-              </a:rPr>
-              <a:t>The adjoined element is not always a root itself</a:t>
-            </a:r>
-            <a:r>
-              <a:rPr sz="1200" b="0" i="0">
-                <a:solidFill>
-                  <a:srgbClr val="0F9E8E"/>
-                </a:solidFill>
-                <a:latin typeface="Noto Sans CJK JP"/>
-                <a:ea typeface="Noto Sans CJK JP"/>
-              </a:rPr>
-              <a:t>   (App.1 P13 ・ App.2 P15)</a:t>
-            </a:r>
-          </a:p>
-        </p:txBody>
-      </p:sp>
-      <p:sp>
-        <p:nvSpPr>
-          <p:cNvPr id="16" name="TextBox 15"/>
-          <p:cNvSpPr txBox="1"/>
-          <p:nvPr/>
-        </p:nvSpPr>
-        <p:spPr>
-          <a:xfrm>
-            <a:off x="1325880" y="5120640"/>
-            <a:ext cx="10058400" cy="1097280"/>
-          </a:xfrm>
-          <a:prstGeom prst="rect">
-            <a:avLst/>
-          </a:prstGeom>
-          <a:noFill/>
-        </p:spPr>
-        <p:txBody>
-          <a:bodyPr wrap="square" lIns="0" rIns="0" tIns="0" bIns="0">
-            <a:spAutoFit/>
-          </a:bodyPr>
-          <a:lstStyle/>
-          <a:p>
-            <a:pPr>
-              <a:lnSpc>
-                <a:spcPct val="105000"/>
-              </a:lnSpc>
-            </a:pPr>
-            <a:r>
-              <a:rPr sz="1200">
-                <a:solidFill>
-                  <a:srgbClr val="1A2238"/>
-                </a:solidFill>
-                <a:latin typeface="Noto Sans CJK JP"/>
-                <a:ea typeface="Noto Sans CJK JP"/>
-              </a:rPr>
-              <a:t>The element adjoined when shrinking is not necessarily a root of the equation; a helper number needed to express the roots may be adjoined first.</a:t>
-            </a:r>
-          </a:p>
-          <a:p>
-            <a:pPr>
-              <a:lnSpc>
-                <a:spcPct val="105000"/>
-              </a:lnSpc>
-            </a:pPr>
-            <a:r>
-              <a:rPr sz="1200">
-                <a:solidFill>
-                  <a:srgbClr val="1A2238"/>
-                </a:solidFill>
-                <a:latin typeface="Noto Sans CJK JP"/>
-                <a:ea typeface="Noto Sans CJK JP"/>
-              </a:rPr>
-              <a:t>Example: in ax²+bx+c=0, the √(b²−4ac) in the quadratic formula is not a root itself but a radical adjoined to express the roots.</a:t>
-            </a:r>
-          </a:p>
-          <a:p>
-            <a:pPr>
-              <a:lnSpc>
-                <a:spcPct val="105000"/>
-              </a:lnSpc>
-            </a:pPr>
-            <a:r>
-              <a:rPr sz="1200">
-                <a:solidFill>
-                  <a:srgbClr val="1A2238"/>
-                </a:solidFill>
-                <a:latin typeface="Noto Sans CJK JP"/>
-                <a:ea typeface="Noto Sans CJK JP"/>
-              </a:rPr>
-              <a:t>For x³−2 too, among the roots α,αω,αω² (α=³√2), ω is not a root, yet expressing all three needs ω.</a:t>
-            </a:r>
-          </a:p>
-          <a:p>
-            <a:pPr>
-              <a:lnSpc>
-                <a:spcPct val="105000"/>
-              </a:lnSpc>
-            </a:pPr>
-            <a:r>
-              <a:rPr sz="1200">
-                <a:solidFill>
-                  <a:srgbClr val="1A2238"/>
-                </a:solidFill>
-                <a:latin typeface="Noto Sans CJK JP"/>
-                <a:ea typeface="Noto Sans CJK JP"/>
-              </a:rPr>
-              <a:t>Solving by radicals = adjoining the needed numbers in order until the group shrinks to {e}.</a:t>
-            </a:r>
-          </a:p>
-        </p:txBody>
-      </p:sp>
-      <p:sp>
-        <p:nvSpPr>
-          <p:cNvPr id="17" name="TextBox 16"/>
-          <p:cNvSpPr txBox="1"/>
-          <p:nvPr/>
-        </p:nvSpPr>
-        <p:spPr>
-          <a:xfrm>
-            <a:off x="11369040" y="6355080"/>
-            <a:ext cx="457200" cy="274320"/>
-          </a:xfrm>
-          <a:prstGeom prst="rect">
-            <a:avLst/>
-          </a:prstGeom>
-          <a:noFill/>
-        </p:spPr>
-        <p:txBody>
-          <a:bodyPr wrap="square" anchor="t" lIns="0" rIns="0" tIns="0" bIns="0">
-            <a:spAutoFit/>
-          </a:bodyPr>
-          <a:lstStyle/>
-          <a:p>
-            <a:pPr algn="r"/>
-            <a:r>
-              <a:rPr sz="1100" b="0" i="0">
-                <a:solidFill>
-                  <a:srgbClr val="6B7180"/>
-                </a:solidFill>
-                <a:latin typeface="Noto Sans CJK JP"/>
-                <a:ea typeface="Noto Sans CJK JP"/>
-              </a:rPr>
-              <a:t>18</a:t>
-            </a:r>
-          </a:p>
-        </p:txBody>
-      </p:sp>
-      <p:sp>
-        <p:nvSpPr>
-          <p:cNvPr id="18" name="TextBox 17"/>
-          <p:cNvSpPr txBox="1"/>
-          <p:nvPr/>
-        </p:nvSpPr>
-        <p:spPr>
-          <a:xfrm>
-            <a:off x="457200" y="6355080"/>
-            <a:ext cx="4572000" cy="274320"/>
-          </a:xfrm>
-          <a:prstGeom prst="rect">
-            <a:avLst/>
-          </a:prstGeom>
-          <a:noFill/>
-        </p:spPr>
-        <p:txBody>
-          <a:bodyPr wrap="square" anchor="t" lIns="0" rIns="0" tIns="0" bIns="0">
-            <a:spAutoFit/>
-          </a:bodyPr>
-          <a:lstStyle/>
-          <a:p>
-            <a:pPr algn="l"/>
-            <a:r>
-              <a:rPr sz="1000" b="0" i="0">
-                <a:solidFill>
-                  <a:srgbClr val="6B7180"/>
-                </a:solidFill>
-                <a:latin typeface="Noto Sans CJK JP"/>
-                <a:ea typeface="Noto Sans CJK JP"/>
-              </a:rPr>
-              <a:t>5garashi.com Design Office</a:t>
-            </a:r>
-          </a:p>
-        </p:txBody>
-      </p:sp>
-    </p:spTree>
-  </p:cSld>
-  <p:clrMapOvr>
-    <a:masterClrMapping/>
-  </p:clrMapOvr>
-</p:sld>
-</file>
-
-<file path=ppt/slides/slide18.xml><?xml version="1.0" encoding="utf-8"?>
 <p:sld xmlns:a="http://schemas.openxmlformats.org/drawingml/2006/main" xmlns:p="http://schemas.openxmlformats.org/presentationml/2006/main" xmlns:r="http://schemas.openxmlformats.org/officeDocument/2006/relationships">
   <p:cSld>
     <p:bg>
@@ -9615,6 +7254,2367 @@
 </p:sld>
 </file>
 
+<file path=ppt/slides/slide16.xml><?xml version="1.0" encoding="utf-8"?>
+<p:sld xmlns:a="http://schemas.openxmlformats.org/drawingml/2006/main" xmlns:r="http://schemas.openxmlformats.org/officeDocument/2006/relationships" xmlns:p="http://schemas.openxmlformats.org/presentationml/2006/main">
+  <p:cSld name="Slide 15">
+    <p:bg>
+      <p:bgPr>
+        <a:solidFill>
+          <a:srgbClr val="FFFFFF"/>
+        </a:solidFill>
+        <a:effectLst/>
+      </p:bgPr>
+    </p:bg>
+    <p:spTree>
+      <p:nvGrpSpPr>
+        <p:cNvPr id="1" name=""/>
+        <p:cNvGrpSpPr/>
+        <p:nvPr/>
+      </p:nvGrpSpPr>
+      <p:grpSpPr>
+        <a:xfrm>
+          <a:off x="0" y="0"/>
+          <a:ext cx="0" cy="0"/>
+          <a:chOff x="0" y="0"/>
+          <a:chExt cx="0" cy="0"/>
+        </a:xfrm>
+      </p:grpSpPr>
+      <p:sp>
+        <p:nvSpPr>
+          <p:cNvPr id="2" name="Shape 0"/>
+          <p:cNvSpPr/>
+          <p:nvPr/>
+        </p:nvSpPr>
+        <p:spPr>
+          <a:xfrm>
+            <a:off x="640080" y="502920"/>
+            <a:ext cx="146304" cy="146304"/>
+          </a:xfrm>
+          <a:prstGeom prst="ellipse">
+            <a:avLst/>
+          </a:prstGeom>
+          <a:solidFill>
+            <a:srgbClr val="0F9E8E"/>
+          </a:solidFill>
+          <a:ln/>
+        </p:spPr>
+        <p:txBody>
+          <a:bodyPr/>
+          <a:p/>
+        </p:txBody>
+      </p:sp>
+      <p:sp>
+        <p:nvSpPr>
+          <p:cNvPr id="3" name="Text 1"/>
+          <p:cNvSpPr/>
+          <p:nvPr/>
+        </p:nvSpPr>
+        <p:spPr>
+          <a:xfrm>
+            <a:off x="896112" y="393192"/>
+            <a:ext cx="5486400" cy="365760"/>
+          </a:xfrm>
+          <a:prstGeom prst="rect">
+            <a:avLst/>
+          </a:prstGeom>
+          <a:noFill/>
+          <a:ln/>
+        </p:spPr>
+        <p:txBody>
+          <a:bodyPr wrap="square" lIns="0" tIns="0" rIns="0" bIns="0" rtlCol="0" anchor="ctr"/>
+          <a:lstStyle/>
+          <a:p>
+            <a:pPr marL="0" indent="0">
+              <a:buNone/>
+            </a:pPr>
+            <a:r>
+              <a:rPr lang="en-US" sz="1600" b="1" dirty="0">
+                <a:solidFill>
+                  <a:srgbClr val="0F9E8E"/>
+                </a:solidFill>
+                <a:latin typeface="Noto Sans CJK JP" pitchFamily="34" charset="0"/>
+                <a:ea typeface="Noto Sans CJK JP"/>
+                <a:cs typeface="Noto Sans CJK JP" pitchFamily="34" charset="-120"/>
+              </a:rPr>
+              <a:t>Appendix 2</a:t>
+            </a:r>
+            <a:endParaRPr lang="en-US" sz="1600" dirty="0"/>
+          </a:p>
+        </p:txBody>
+      </p:sp>
+      <p:sp>
+        <p:nvSpPr>
+          <p:cNvPr id="4" name="Text 2"/>
+          <p:cNvSpPr/>
+          <p:nvPr/>
+        </p:nvSpPr>
+        <p:spPr>
+          <a:xfrm>
+            <a:off x="640080" y="822960"/>
+            <a:ext cx="10972800" cy="640080"/>
+          </a:xfrm>
+          <a:prstGeom prst="rect">
+            <a:avLst/>
+          </a:prstGeom>
+          <a:noFill/>
+          <a:ln/>
+        </p:spPr>
+        <p:txBody>
+          <a:bodyPr wrap="square" lIns="0" tIns="0" rIns="0" bIns="0" rtlCol="0" anchor="ctr"/>
+          <a:lstStyle/>
+          <a:p>
+            <a:pPr marL="0" indent="0">
+              <a:buNone/>
+            </a:pPr>
+            <a:r>
+              <a:rPr lang="en-US" sz="2800" b="1" dirty="0">
+                <a:solidFill>
+                  <a:srgbClr val="1A2238"/>
+                </a:solidFill>
+                <a:latin typeface="Noto Sans CJK JP" pitchFamily="34" charset="0"/>
+                <a:ea typeface="Noto Sans CJK JP"/>
+                <a:cs typeface="Noto Sans CJK JP" pitchFamily="34" charset="-120"/>
+              </a:rPr>
+              <a:t>The shrinking chain for x³−2 and the solvability conclusion</a:t>
+            </a:r>
+            <a:endParaRPr lang="en-US" sz="2800" dirty="0"/>
+          </a:p>
+        </p:txBody>
+      </p:sp>
+      <p:sp>
+        <p:nvSpPr>
+          <p:cNvPr id="5" name="Text 3"/>
+          <p:cNvSpPr/>
+          <p:nvPr/>
+        </p:nvSpPr>
+        <p:spPr>
+          <a:xfrm>
+            <a:off x="640080" y="1554480"/>
+            <a:ext cx="10058400" cy="365760"/>
+          </a:xfrm>
+          <a:prstGeom prst="rect">
+            <a:avLst/>
+          </a:prstGeom>
+          <a:noFill/>
+          <a:ln/>
+        </p:spPr>
+        <p:txBody>
+          <a:bodyPr wrap="square" lIns="0" tIns="0" rIns="0" bIns="0" rtlCol="0" anchor="ctr"/>
+          <a:lstStyle/>
+          <a:p>
+            <a:pPr marL="0" indent="0">
+              <a:buNone/>
+            </a:pPr>
+            <a:r>
+              <a:rPr lang="en-US" sz="1600" b="1" dirty="0">
+                <a:solidFill>
+                  <a:srgbClr val="0F9E8E"/>
+                </a:solidFill>
+                <a:latin typeface="Noto Sans CJK JP" pitchFamily="34" charset="0"/>
+                <a:ea typeface="Noto Sans CJK JP"/>
+                <a:cs typeface="Noto Sans CJK JP" pitchFamily="34" charset="-120"/>
+              </a:rPr>
+              <a:t>Two steps to solve x³−2=0</a:t>
+            </a:r>
+            <a:endParaRPr lang="en-US" sz="1600" dirty="0"/>
+          </a:p>
+        </p:txBody>
+      </p:sp>
+      <p:sp>
+        <p:nvSpPr>
+          <p:cNvPr id="6" name="Shape 4"/>
+          <p:cNvSpPr/>
+          <p:nvPr/>
+        </p:nvSpPr>
+        <p:spPr>
+          <a:xfrm>
+            <a:off x="640080" y="1965960"/>
+            <a:ext cx="5303520" cy="1371600"/>
+          </a:xfrm>
+          <a:prstGeom prst="roundRect">
+            <a:avLst>
+              <a:gd name="adj" fmla="val 5333"/>
+            </a:avLst>
+          </a:prstGeom>
+          <a:solidFill>
+            <a:srgbClr val="E5F5F2"/>
+          </a:solidFill>
+          <a:ln w="12700">
+            <a:solidFill>
+              <a:srgbClr val="0F9E8E"/>
+            </a:solidFill>
+            <a:prstDash val="solid"/>
+          </a:ln>
+        </p:spPr>
+        <p:txBody>
+          <a:bodyPr/>
+          <a:p/>
+        </p:txBody>
+      </p:sp>
+      <p:sp>
+        <p:nvSpPr>
+          <p:cNvPr id="7" name="Text 5"/>
+          <p:cNvSpPr/>
+          <p:nvPr/>
+        </p:nvSpPr>
+        <p:spPr>
+          <a:xfrm>
+            <a:off x="868680" y="2075688"/>
+            <a:ext cx="4846320" cy="365760"/>
+          </a:xfrm>
+          <a:prstGeom prst="rect">
+            <a:avLst/>
+          </a:prstGeom>
+          <a:noFill/>
+          <a:ln/>
+        </p:spPr>
+        <p:txBody>
+          <a:bodyPr wrap="square" lIns="0" tIns="0" rIns="0" bIns="0" rtlCol="0" anchor="ctr"/>
+          <a:lstStyle/>
+          <a:p>
+            <a:pPr marL="0" indent="0">
+              <a:buNone/>
+            </a:pPr>
+            <a:r>
+              <a:rPr lang="en-US" sz="1600" b="1" dirty="0">
+                <a:solidFill>
+                  <a:srgbClr val="1A2238"/>
+                </a:solidFill>
+                <a:latin typeface="Noto Sans CJK JP" pitchFamily="34" charset="0"/>
+                <a:ea typeface="Noto Sans CJK JP"/>
+                <a:cs typeface="Noto Sans CJK JP" pitchFamily="34" charset="-120"/>
+              </a:rPr>
+              <a:t>STEP 1: adjoin ω</a:t>
+            </a:r>
+            <a:endParaRPr lang="en-US" sz="1600" dirty="0"/>
+          </a:p>
+        </p:txBody>
+      </p:sp>
+      <p:sp>
+        <p:nvSpPr>
+          <p:cNvPr id="8" name="Text 6"/>
+          <p:cNvSpPr/>
+          <p:nvPr/>
+        </p:nvSpPr>
+        <p:spPr>
+          <a:xfrm>
+            <a:off x="868680" y="2450592"/>
+            <a:ext cx="4937760" cy="868680"/>
+          </a:xfrm>
+          <a:prstGeom prst="rect">
+            <a:avLst/>
+          </a:prstGeom>
+          <a:noFill/>
+          <a:ln/>
+        </p:spPr>
+        <p:txBody>
+          <a:bodyPr wrap="square" lIns="0" tIns="0" rIns="0" bIns="0" rtlCol="0" anchor="t"/>
+          <a:lstStyle/>
+          <a:p>
+            <a:pPr marL="0" indent="0">
+              <a:lnSpc>
+                <a:spcPct val="120000"/>
+              </a:lnSpc>
+              <a:buNone/>
+            </a:pPr>
+            <a:r>
+              <a:rPr lang="en-US" sz="1300" dirty="0">
+                <a:solidFill>
+                  <a:srgbClr val="33384A"/>
+                </a:solidFill>
+                <a:latin typeface="Noto Sans CJK JP" pitchFamily="34" charset="0"/>
+                <a:ea typeface="Noto Sans CJK JP"/>
+                <a:cs typeface="Noto Sans CJK JP" pitchFamily="34" charset="-120"/>
+              </a:rPr>
+              <a:t>field: Q → L = Q(ω)</a:t>
+            </a:r>
+            <a:endParaRPr lang="en-US" sz="1300" dirty="0"/>
+          </a:p>
+          <a:p>
+            <a:pPr marL="0" indent="0">
+              <a:lnSpc>
+                <a:spcPct val="120000"/>
+              </a:lnSpc>
+              <a:buNone/>
+            </a:pPr>
+            <a:r>
+              <a:rPr lang="en-US" sz="1300" dirty="0">
+                <a:solidFill>
+                  <a:srgbClr val="33384A"/>
+                </a:solidFill>
+                <a:latin typeface="Noto Sans CJK JP" pitchFamily="34" charset="0"/>
+                <a:ea typeface="Noto Sans CJK JP"/>
+                <a:cs typeface="Noto Sans CJK JP" pitchFamily="34" charset="-120"/>
+              </a:rPr>
+              <a:t>group: S₃ → A₃ (order 3)</a:t>
+            </a:r>
+            <a:endParaRPr lang="en-US" sz="1300" dirty="0"/>
+          </a:p>
+          <a:p>
+            <a:pPr marL="0" indent="0">
+              <a:lnSpc>
+                <a:spcPct val="120000"/>
+              </a:lnSpc>
+              <a:buNone/>
+            </a:pPr>
+            <a:r>
+              <a:rPr lang="en-US" sz="1300" dirty="0">
+                <a:solidFill>
+                  <a:srgbClr val="3457A6"/>
+                </a:solidFill>
+                <a:latin typeface="Noto Sans CJK JP" pitchFamily="34" charset="0"/>
+                <a:ea typeface="Noto Sans CJK JP"/>
+                <a:cs typeface="Noto Sans CJK JP" pitchFamily="34" charset="-120"/>
+              </a:rPr>
+              <a:t>quotient order 2 = square root (√−3)</a:t>
+            </a:r>
+            <a:endParaRPr lang="en-US" sz="1300" dirty="0"/>
+          </a:p>
+        </p:txBody>
+      </p:sp>
+      <p:sp>
+        <p:nvSpPr>
+          <p:cNvPr id="9" name="Shape 7"/>
+          <p:cNvSpPr/>
+          <p:nvPr/>
+        </p:nvSpPr>
+        <p:spPr>
+          <a:xfrm>
+            <a:off x="6217920" y="1965960"/>
+            <a:ext cx="5303520" cy="1371600"/>
+          </a:xfrm>
+          <a:prstGeom prst="roundRect">
+            <a:avLst>
+              <a:gd name="adj" fmla="val 5333"/>
+            </a:avLst>
+          </a:prstGeom>
+          <a:solidFill>
+            <a:srgbClr val="E5F5F2"/>
+          </a:solidFill>
+          <a:ln w="12700">
+            <a:solidFill>
+              <a:srgbClr val="0F9E8E"/>
+            </a:solidFill>
+            <a:prstDash val="solid"/>
+          </a:ln>
+        </p:spPr>
+        <p:txBody>
+          <a:bodyPr/>
+          <a:p/>
+        </p:txBody>
+      </p:sp>
+      <p:sp>
+        <p:nvSpPr>
+          <p:cNvPr id="10" name="Text 8"/>
+          <p:cNvSpPr/>
+          <p:nvPr/>
+        </p:nvSpPr>
+        <p:spPr>
+          <a:xfrm>
+            <a:off x="6446520" y="2075688"/>
+            <a:ext cx="4846320" cy="365760"/>
+          </a:xfrm>
+          <a:prstGeom prst="rect">
+            <a:avLst/>
+          </a:prstGeom>
+          <a:noFill/>
+          <a:ln/>
+        </p:spPr>
+        <p:txBody>
+          <a:bodyPr wrap="square" lIns="0" tIns="0" rIns="0" bIns="0" rtlCol="0" anchor="ctr"/>
+          <a:lstStyle/>
+          <a:p>
+            <a:pPr marL="0" indent="0">
+              <a:buNone/>
+            </a:pPr>
+            <a:r>
+              <a:rPr lang="en-US" sz="1600" b="1" dirty="0">
+                <a:solidFill>
+                  <a:srgbClr val="1A2238"/>
+                </a:solidFill>
+                <a:latin typeface="Noto Sans CJK JP" pitchFamily="34" charset="0"/>
+                <a:ea typeface="Noto Sans CJK JP"/>
+                <a:cs typeface="Noto Sans CJK JP" pitchFamily="34" charset="-120"/>
+              </a:rPr>
+              <a:t>STEP 2: adjoin ³√2</a:t>
+            </a:r>
+            <a:endParaRPr lang="en-US" sz="1600" dirty="0"/>
+          </a:p>
+        </p:txBody>
+      </p:sp>
+      <p:sp>
+        <p:nvSpPr>
+          <p:cNvPr id="11" name="Text 9"/>
+          <p:cNvSpPr/>
+          <p:nvPr/>
+        </p:nvSpPr>
+        <p:spPr>
+          <a:xfrm>
+            <a:off x="6446520" y="2450592"/>
+            <a:ext cx="4937760" cy="868680"/>
+          </a:xfrm>
+          <a:prstGeom prst="rect">
+            <a:avLst/>
+          </a:prstGeom>
+          <a:noFill/>
+          <a:ln/>
+        </p:spPr>
+        <p:txBody>
+          <a:bodyPr wrap="square" lIns="0" tIns="0" rIns="0" bIns="0" rtlCol="0" anchor="t"/>
+          <a:lstStyle/>
+          <a:p>
+            <a:pPr marL="0" indent="0">
+              <a:lnSpc>
+                <a:spcPct val="120000"/>
+              </a:lnSpc>
+              <a:buNone/>
+            </a:pPr>
+            <a:r>
+              <a:rPr lang="en-US" sz="1300" dirty="0">
+                <a:solidFill>
+                  <a:srgbClr val="33384A"/>
+                </a:solidFill>
+                <a:latin typeface="Noto Sans CJK JP" pitchFamily="34" charset="0"/>
+                <a:ea typeface="Noto Sans CJK JP"/>
+                <a:cs typeface="Noto Sans CJK JP" pitchFamily="34" charset="-120"/>
+              </a:rPr>
+              <a:t>field: L → K = Q(ω, ³√2)</a:t>
+            </a:r>
+            <a:endParaRPr lang="en-US" sz="1300" dirty="0"/>
+          </a:p>
+          <a:p>
+            <a:pPr marL="0" indent="0">
+              <a:lnSpc>
+                <a:spcPct val="120000"/>
+              </a:lnSpc>
+              <a:buNone/>
+            </a:pPr>
+            <a:r>
+              <a:rPr lang="en-US" sz="1300" dirty="0">
+                <a:solidFill>
+                  <a:srgbClr val="33384A"/>
+                </a:solidFill>
+                <a:latin typeface="Noto Sans CJK JP" pitchFamily="34" charset="0"/>
+                <a:ea typeface="Noto Sans CJK JP"/>
+                <a:cs typeface="Noto Sans CJK JP" pitchFamily="34" charset="-120"/>
+              </a:rPr>
+              <a:t>group: A₃ → { e }</a:t>
+            </a:r>
+            <a:endParaRPr lang="en-US" sz="1300" dirty="0"/>
+          </a:p>
+          <a:p>
+            <a:pPr marL="0" indent="0">
+              <a:lnSpc>
+                <a:spcPct val="120000"/>
+              </a:lnSpc>
+              <a:buNone/>
+            </a:pPr>
+            <a:r>
+              <a:rPr lang="en-US" sz="1300" dirty="0">
+                <a:solidFill>
+                  <a:srgbClr val="3457A6"/>
+                </a:solidFill>
+                <a:latin typeface="Noto Sans CJK JP" pitchFamily="34" charset="0"/>
+                <a:ea typeface="Noto Sans CJK JP"/>
+                <a:cs typeface="Noto Sans CJK JP" pitchFamily="34" charset="-120"/>
+              </a:rPr>
+              <a:t>quotient order 3 = cube root</a:t>
+            </a:r>
+            <a:endParaRPr lang="en-US" sz="1300" dirty="0"/>
+          </a:p>
+        </p:txBody>
+      </p:sp>
+      <p:sp>
+        <p:nvSpPr>
+          <p:cNvPr id="12" name="Text 10"/>
+          <p:cNvSpPr/>
+          <p:nvPr/>
+        </p:nvSpPr>
+        <p:spPr>
+          <a:xfrm>
+            <a:off x="640080" y="3474720"/>
+            <a:ext cx="10881360" cy="365760"/>
+          </a:xfrm>
+          <a:prstGeom prst="rect">
+            <a:avLst/>
+          </a:prstGeom>
+          <a:noFill/>
+          <a:ln/>
+        </p:spPr>
+        <p:txBody>
+          <a:bodyPr wrap="square" lIns="0" tIns="0" rIns="0" bIns="0" rtlCol="0" anchor="ctr"/>
+          <a:lstStyle/>
+          <a:p>
+            <a:pPr marL="0" indent="0">
+              <a:buNone/>
+            </a:pPr>
+            <a:r>
+              <a:rPr lang="en-US" sz="1400" i="1" dirty="0">
+                <a:solidFill>
+                  <a:srgbClr val="6B7180"/>
+                </a:solidFill>
+                <a:latin typeface="Noto Sans CJK JP" pitchFamily="34" charset="0"/>
+                <a:ea typeface="Noto Sans CJK JP"/>
+                <a:cs typeface="Noto Sans CJK JP" pitchFamily="34" charset="-120"/>
+              </a:rPr>
+              <a:t>Once the group shrinks to { e }, no unknowns remain and the adjoined elements express the roots.</a:t>
+            </a:r>
+            <a:endParaRPr lang="en-US" sz="1400" dirty="0"/>
+          </a:p>
+        </p:txBody>
+      </p:sp>
+      <p:sp>
+        <p:nvSpPr>
+          <p:cNvPr id="13" name="Shape 11"/>
+          <p:cNvSpPr/>
+          <p:nvPr/>
+        </p:nvSpPr>
+        <p:spPr>
+          <a:xfrm>
+            <a:off x="640080" y="4023360"/>
+            <a:ext cx="64008" cy="2011680"/>
+          </a:xfrm>
+          <a:prstGeom prst="rect">
+            <a:avLst/>
+          </a:prstGeom>
+          <a:solidFill>
+            <a:srgbClr val="1A2238"/>
+          </a:solidFill>
+          <a:ln/>
+        </p:spPr>
+        <p:txBody>
+          <a:bodyPr/>
+          <a:p/>
+        </p:txBody>
+      </p:sp>
+      <p:sp>
+        <p:nvSpPr>
+          <p:cNvPr id="14" name="Text 12"/>
+          <p:cNvSpPr/>
+          <p:nvPr/>
+        </p:nvSpPr>
+        <p:spPr>
+          <a:xfrm>
+            <a:off x="868680" y="3977640"/>
+            <a:ext cx="10058400" cy="365760"/>
+          </a:xfrm>
+          <a:prstGeom prst="rect">
+            <a:avLst/>
+          </a:prstGeom>
+          <a:noFill/>
+          <a:ln/>
+        </p:spPr>
+        <p:txBody>
+          <a:bodyPr wrap="square" lIns="0" tIns="0" rIns="0" bIns="0" rtlCol="0" anchor="ctr"/>
+          <a:lstStyle/>
+          <a:p>
+            <a:pPr marL="0" indent="0">
+              <a:buNone/>
+            </a:pPr>
+            <a:r>
+              <a:rPr lang="en-US" sz="1600" b="1" dirty="0">
+                <a:solidFill>
+                  <a:srgbClr val="1A2238"/>
+                </a:solidFill>
+                <a:latin typeface="Noto Sans CJK JP" pitchFamily="34" charset="0"/>
+                <a:ea typeface="Noto Sans CJK JP"/>
+                <a:cs typeface="Noto Sans CJK JP" pitchFamily="34" charset="-120"/>
+              </a:rPr>
+              <a:t>Generalization: what "solvable by radicals" means</a:t>
+            </a:r>
+            <a:endParaRPr lang="en-US" sz="1600" dirty="0"/>
+          </a:p>
+        </p:txBody>
+      </p:sp>
+      <p:sp>
+        <p:nvSpPr>
+          <p:cNvPr id="15" name="Text 13"/>
+          <p:cNvSpPr/>
+          <p:nvPr/>
+        </p:nvSpPr>
+        <p:spPr>
+          <a:xfrm>
+            <a:off x="868680" y="4370832"/>
+            <a:ext cx="10607040" cy="1828800"/>
+          </a:xfrm>
+          <a:prstGeom prst="rect">
+            <a:avLst/>
+          </a:prstGeom>
+          <a:noFill/>
+          <a:ln/>
+        </p:spPr>
+        <p:txBody>
+          <a:bodyPr wrap="square" lIns="0" tIns="0" rIns="0" bIns="0" rtlCol="0" anchor="ctr"/>
+          <a:lstStyle/>
+          <a:p>
+            <a:pPr marL="0" indent="0">
+              <a:lnSpc>
+                <a:spcPct val="125000"/>
+              </a:lnSpc>
+              <a:buNone/>
+            </a:pPr>
+            <a:r>
+              <a:rPr lang="en-US" sz="1400" dirty="0">
+                <a:solidFill>
+                  <a:srgbClr val="33384A"/>
+                </a:solidFill>
+                <a:latin typeface="Noto Sans CJK JP" pitchFamily="34" charset="0"/>
+                <a:ea typeface="Noto Sans CJK JP"/>
+                <a:cs typeface="Noto Sans CJK JP" pitchFamily="34" charset="-120"/>
+              </a:rPr>
+              <a:t>At each step, the quotient of the larger group by the smaller (normal) subgroup must be cyclic. The order of that cyclic group equals the index of the radical adjoined at that step.</a:t>
+            </a:r>
+            <a:endParaRPr lang="en-US" sz="1400" dirty="0"/>
+          </a:p>
+          <a:p>
+            <a:pPr marL="0" indent="0">
+              <a:lnSpc>
+                <a:spcPct val="125000"/>
+              </a:lnSpc>
+              <a:buNone/>
+            </a:pPr>
+            <a:r>
+              <a:rPr lang="en-US" sz="1400" dirty="0">
+                <a:solidFill>
+                  <a:srgbClr val="33384A"/>
+                </a:solidFill>
+                <a:latin typeface="Noto Sans CJK JP" pitchFamily="34" charset="0"/>
+                <a:ea typeface="Noto Sans CJK JP"/>
+                <a:cs typeface="Noto Sans CJK JP" pitchFamily="34" charset="-120"/>
+              </a:rPr>
+              <a:t>Being solvable by radicals means this shrinking-and-growing repeats until the group reaches { e } and the field K reaches the splitting field.</a:t>
+            </a:r>
+            <a:endParaRPr lang="en-US" sz="1400" dirty="0"/>
+          </a:p>
+          <a:p>
+            <a:pPr marL="0" indent="0">
+              <a:lnSpc>
+                <a:spcPct val="125000"/>
+              </a:lnSpc>
+              <a:buNone/>
+            </a:pPr>
+            <a:r>
+              <a:rPr lang="en-US" sz="1400" b="1" dirty="0">
+                <a:solidFill>
+                  <a:srgbClr val="D8593A"/>
+                </a:solidFill>
+                <a:latin typeface="Noto Sans CJK JP" pitchFamily="34" charset="0"/>
+                <a:ea typeface="Noto Sans CJK JP"/>
+                <a:cs typeface="Noto Sans CJK JP" pitchFamily="34" charset="-120"/>
+              </a:rPr>
+              <a:t>Up to degree 4, such a chain exists for any coefficients, so all are solvable by radicals. From degree 5 up, some equations have no such chain; those that cannot reach { e } are not solvable by radicals.</a:t>
+            </a:r>
+            <a:endParaRPr lang="en-US" sz="1400" dirty="0"/>
+          </a:p>
+        </p:txBody>
+      </p:sp>
+      <p:sp>
+        <p:nvSpPr>
+          <p:cNvPr id="16" name="Text 14"/>
+          <p:cNvSpPr/>
+          <p:nvPr/>
+        </p:nvSpPr>
+        <p:spPr>
+          <a:xfrm>
+            <a:off x="11338560" y="6355080"/>
+            <a:ext cx="457200" cy="274320"/>
+          </a:xfrm>
+          <a:prstGeom prst="rect">
+            <a:avLst/>
+          </a:prstGeom>
+          <a:noFill/>
+          <a:ln/>
+        </p:spPr>
+        <p:txBody>
+          <a:bodyPr wrap="square" lIns="0" tIns="0" rIns="0" bIns="0" rtlCol="0" anchor="ctr"/>
+          <a:lstStyle/>
+          <a:p>
+            <a:pPr marL="0" indent="0" algn="r">
+              <a:buNone/>
+            </a:pPr>
+            <a:r>
+              <a:rPr lang="en-US" sz="1100" dirty="0">
+                <a:solidFill>
+                  <a:srgbClr val="6B7180"/>
+                </a:solidFill>
+                <a:latin typeface="Noto Sans CJK JP" pitchFamily="34" charset="0"/>
+                <a:ea typeface="Noto Sans CJK JP"/>
+                <a:cs typeface="Noto Sans CJK JP" pitchFamily="34" charset="-120"/>
+              </a:rPr>
+              <a:t>16</a:t>
+            </a:r>
+            <a:endParaRPr lang="en-US" sz="1100" dirty="0"/>
+          </a:p>
+        </p:txBody>
+      </p:sp>
+      <p:sp>
+        <p:nvSpPr>
+          <p:cNvPr id="17" name="Text 15"/>
+          <p:cNvSpPr/>
+          <p:nvPr/>
+        </p:nvSpPr>
+        <p:spPr>
+          <a:xfrm>
+            <a:off x="457200" y="6355080"/>
+            <a:ext cx="4572000" cy="274320"/>
+          </a:xfrm>
+          <a:prstGeom prst="rect">
+            <a:avLst/>
+          </a:prstGeom>
+          <a:noFill/>
+          <a:ln/>
+        </p:spPr>
+        <p:txBody>
+          <a:bodyPr wrap="square" lIns="0" tIns="0" rIns="0" bIns="0" rtlCol="0" anchor="ctr"/>
+          <a:lstStyle/>
+          <a:p>
+            <a:pPr marL="0" indent="0" algn="l">
+              <a:buNone/>
+            </a:pPr>
+            <a:r>
+              <a:rPr lang="en-US" sz="1000" dirty="0">
+                <a:solidFill>
+                  <a:srgbClr val="6B7180"/>
+                </a:solidFill>
+                <a:latin typeface="Noto Sans CJK JP" pitchFamily="34" charset="0"/>
+                <a:ea typeface="Noto Sans CJK JP"/>
+                <a:cs typeface="Noto Sans CJK JP" pitchFamily="34" charset="-120"/>
+              </a:rPr>
+              <a:t>5garashi.com Design Office</a:t>
+            </a:r>
+            <a:endParaRPr lang="en-US" sz="1000" dirty="0"/>
+          </a:p>
+        </p:txBody>
+      </p:sp>
+    </p:spTree>
+  </p:cSld>
+  <p:clrMapOvr>
+    <a:masterClrMapping/>
+  </p:clrMapOvr>
+</p:sld>
+</file>
+
+<file path=ppt/slides/slide17.xml><?xml version="1.0" encoding="utf-8"?>
+<p:sld xmlns:a="http://schemas.openxmlformats.org/drawingml/2006/main" xmlns:p="http://schemas.openxmlformats.org/presentationml/2006/main" xmlns:r="http://schemas.openxmlformats.org/officeDocument/2006/relationships">
+  <p:cSld>
+    <p:spTree>
+      <p:nvGrpSpPr>
+        <p:cNvPr id="1" name=""/>
+        <p:cNvGrpSpPr/>
+        <p:nvPr/>
+      </p:nvGrpSpPr>
+      <p:grpSpPr/>
+      <p:sp>
+        <p:nvSpPr>
+          <p:cNvPr id="2" name="Oval 1"/>
+          <p:cNvSpPr/>
+          <p:nvPr/>
+        </p:nvSpPr>
+        <p:spPr>
+          <a:xfrm>
+            <a:off x="640080" y="502920"/>
+            <a:ext cx="146304" cy="146304"/>
+          </a:xfrm>
+          <a:prstGeom prst="ellipse">
+            <a:avLst/>
+          </a:prstGeom>
+          <a:solidFill>
+            <a:srgbClr val="0F9E8E"/>
+          </a:solidFill>
+          <a:ln>
+            <a:noFill/>
+          </a:ln>
+          <a:effectLst/>
+        </p:spPr>
+        <p:style>
+          <a:lnRef idx="1">
+            <a:schemeClr val="accent1"/>
+          </a:lnRef>
+          <a:fillRef idx="3">
+            <a:schemeClr val="accent1"/>
+          </a:fillRef>
+          <a:effectRef idx="2">
+            <a:schemeClr val="accent1"/>
+          </a:effectRef>
+          <a:fontRef idx="minor">
+            <a:schemeClr val="lt1"/>
+          </a:fontRef>
+        </p:style>
+        <p:txBody>
+          <a:bodyPr rtlCol="0" anchor="ctr"/>
+          <a:lstStyle/>
+          <a:p>
+            <a:pPr algn="ctr"/>
+          </a:p>
+        </p:txBody>
+      </p:sp>
+      <p:sp>
+        <p:nvSpPr>
+          <p:cNvPr id="3" name="TextBox 2"/>
+          <p:cNvSpPr txBox="1"/>
+          <p:nvPr/>
+        </p:nvSpPr>
+        <p:spPr>
+          <a:xfrm>
+            <a:off x="896112" y="393192"/>
+            <a:ext cx="5486400" cy="365760"/>
+          </a:xfrm>
+          <a:prstGeom prst="rect">
+            <a:avLst/>
+          </a:prstGeom>
+          <a:noFill/>
+        </p:spPr>
+        <p:txBody>
+          <a:bodyPr wrap="square" anchor="t" lIns="0" rIns="0" tIns="0" bIns="0">
+            <a:spAutoFit/>
+          </a:bodyPr>
+          <a:lstStyle/>
+          <a:p>
+            <a:pPr algn="l"/>
+            <a:r>
+              <a:rPr sz="1600" b="1" i="0">
+                <a:solidFill>
+                  <a:srgbClr val="0F9E8E"/>
+                </a:solidFill>
+                <a:latin typeface="Noto Sans CJK JP"/>
+                <a:ea typeface="Noto Sans CJK JP"/>
+              </a:rPr>
+              <a:t>Appendix 3</a:t>
+            </a:r>
+          </a:p>
+        </p:txBody>
+      </p:sp>
+      <p:sp>
+        <p:nvSpPr>
+          <p:cNvPr id="4" name="TextBox 3"/>
+          <p:cNvSpPr txBox="1"/>
+          <p:nvPr/>
+        </p:nvSpPr>
+        <p:spPr>
+          <a:xfrm>
+            <a:off x="640080" y="822960"/>
+            <a:ext cx="10972800" cy="640080"/>
+          </a:xfrm>
+          <a:prstGeom prst="rect">
+            <a:avLst/>
+          </a:prstGeom>
+          <a:noFill/>
+        </p:spPr>
+        <p:txBody>
+          <a:bodyPr wrap="square" anchor="t" lIns="0" rIns="0" tIns="0" bIns="0">
+            <a:spAutoFit/>
+          </a:bodyPr>
+          <a:lstStyle/>
+          <a:p>
+            <a:pPr algn="l"/>
+            <a:r>
+              <a:rPr sz="2600" b="1" i="0">
+                <a:solidFill>
+                  <a:srgbClr val="1A2238"/>
+                </a:solidFill>
+                <a:latin typeface="Noto Sans CJK JP"/>
+                <a:ea typeface="Noto Sans CJK JP"/>
+              </a:rPr>
+              <a:t>Common early stumbling points (1/2)</a:t>
+            </a:r>
+          </a:p>
+        </p:txBody>
+      </p:sp>
+      <p:sp>
+        <p:nvSpPr>
+          <p:cNvPr id="5" name="Rectangle 4"/>
+          <p:cNvSpPr/>
+          <p:nvPr/>
+        </p:nvSpPr>
+        <p:spPr>
+          <a:xfrm>
+            <a:off x="640080" y="1554480"/>
+            <a:ext cx="502920" cy="502920"/>
+          </a:xfrm>
+          <a:prstGeom prst="rect">
+            <a:avLst/>
+          </a:prstGeom>
+          <a:solidFill>
+            <a:srgbClr val="0F9E8E"/>
+          </a:solidFill>
+          <a:ln>
+            <a:noFill/>
+          </a:ln>
+          <a:effectLst/>
+        </p:spPr>
+        <p:style>
+          <a:lnRef idx="1">
+            <a:schemeClr val="accent1"/>
+          </a:lnRef>
+          <a:fillRef idx="3">
+            <a:schemeClr val="accent1"/>
+          </a:fillRef>
+          <a:effectRef idx="2">
+            <a:schemeClr val="accent1"/>
+          </a:effectRef>
+          <a:fontRef idx="minor">
+            <a:schemeClr val="lt1"/>
+          </a:fontRef>
+        </p:style>
+        <p:txBody>
+          <a:bodyPr rtlCol="0" anchor="ctr"/>
+          <a:lstStyle/>
+          <a:p>
+            <a:pPr algn="ctr"/>
+          </a:p>
+        </p:txBody>
+      </p:sp>
+      <p:sp>
+        <p:nvSpPr>
+          <p:cNvPr id="6" name="TextBox 5"/>
+          <p:cNvSpPr txBox="1"/>
+          <p:nvPr/>
+        </p:nvSpPr>
+        <p:spPr>
+          <a:xfrm>
+            <a:off x="640080" y="1554480"/>
+            <a:ext cx="502920" cy="502920"/>
+          </a:xfrm>
+          <a:prstGeom prst="rect">
+            <a:avLst/>
+          </a:prstGeom>
+          <a:noFill/>
+        </p:spPr>
+        <p:txBody>
+          <a:bodyPr wrap="square" anchor="ctr" lIns="0" rIns="0" tIns="0" bIns="0">
+            <a:spAutoFit/>
+          </a:bodyPr>
+          <a:lstStyle/>
+          <a:p>
+            <a:pPr algn="ctr"/>
+            <a:r>
+              <a:rPr sz="2200" b="1" i="0">
+                <a:solidFill>
+                  <a:srgbClr val="FFFFFF"/>
+                </a:solidFill>
+                <a:latin typeface="Noto Sans CJK JP"/>
+                <a:ea typeface="Noto Sans CJK JP"/>
+              </a:rPr>
+              <a:t>1</a:t>
+            </a:r>
+          </a:p>
+        </p:txBody>
+      </p:sp>
+      <p:sp>
+        <p:nvSpPr>
+          <p:cNvPr id="7" name="TextBox 6"/>
+          <p:cNvSpPr txBox="1"/>
+          <p:nvPr/>
+        </p:nvSpPr>
+        <p:spPr>
+          <a:xfrm>
+            <a:off x="1325880" y="1536192"/>
+            <a:ext cx="10058400" cy="411480"/>
+          </a:xfrm>
+          <a:prstGeom prst="rect">
+            <a:avLst/>
+          </a:prstGeom>
+          <a:noFill/>
+        </p:spPr>
+        <p:txBody>
+          <a:bodyPr wrap="square" anchor="ctr" lIns="0" rIns="0" tIns="0" bIns="0">
+            <a:spAutoFit/>
+          </a:bodyPr>
+          <a:lstStyle/>
+          <a:p>
+            <a:pPr algn="l"/>
+            <a:r>
+              <a:rPr sz="1600" b="1" i="0">
+                <a:solidFill>
+                  <a:srgbClr val="1A2238"/>
+                </a:solidFill>
+                <a:latin typeface="Noto Sans CJK JP"/>
+                <a:ea typeface="Noto Sans CJK JP"/>
+              </a:rPr>
+              <a:t>Roots are not missing — they may just be inexpressible by radicals</a:t>
+            </a:r>
+            <a:r>
+              <a:rPr sz="1200" b="0" i="0">
+                <a:solidFill>
+                  <a:srgbClr val="0F9E8E"/>
+                </a:solidFill>
+                <a:latin typeface="Noto Sans CJK JP"/>
+                <a:ea typeface="Noto Sans CJK JP"/>
+              </a:rPr>
+              <a:t>   (main → P9)</a:t>
+            </a:r>
+          </a:p>
+        </p:txBody>
+      </p:sp>
+      <p:sp>
+        <p:nvSpPr>
+          <p:cNvPr id="8" name="TextBox 7"/>
+          <p:cNvSpPr txBox="1"/>
+          <p:nvPr/>
+        </p:nvSpPr>
+        <p:spPr>
+          <a:xfrm>
+            <a:off x="1325880" y="2011680"/>
+            <a:ext cx="10058400" cy="1097280"/>
+          </a:xfrm>
+          <a:prstGeom prst="rect">
+            <a:avLst/>
+          </a:prstGeom>
+          <a:noFill/>
+        </p:spPr>
+        <p:txBody>
+          <a:bodyPr wrap="square" lIns="0" rIns="0" tIns="0" bIns="0">
+            <a:spAutoFit/>
+          </a:bodyPr>
+          <a:lstStyle/>
+          <a:p>
+            <a:pPr>
+              <a:lnSpc>
+                <a:spcPct val="118000"/>
+              </a:lnSpc>
+            </a:pPr>
+            <a:r>
+              <a:rPr sz="1300" b="0">
+                <a:solidFill>
+                  <a:srgbClr val="5A6072"/>
+                </a:solidFill>
+                <a:latin typeface="Noto Sans CJK JP"/>
+                <a:ea typeface="Noto Sans CJK JP"/>
+              </a:rPr>
+              <a:t>For degree ≥ 5, roots always exist if we allow complex numbers. The question is not whether roots exist, but whether they can be written using only </a:t>
+            </a:r>
+            <a:r>
+              <a:rPr sz="1300" b="1">
+                <a:solidFill>
+                  <a:srgbClr val="1A2238"/>
+                </a:solidFill>
+                <a:latin typeface="Noto Sans CJK JP"/>
+                <a:ea typeface="Noto Sans CJK JP"/>
+              </a:rPr>
+              <a:t>the four operations and radicals</a:t>
+            </a:r>
+            <a:r>
+              <a:rPr sz="1300" b="0">
+                <a:solidFill>
+                  <a:srgbClr val="5A6072"/>
+                </a:solidFill>
+                <a:latin typeface="Noto Sans CJK JP"/>
+                <a:ea typeface="Noto Sans CJK JP"/>
+              </a:rPr>
+              <a:t>.</a:t>
+            </a:r>
+          </a:p>
+          <a:p>
+            <a:pPr>
+              <a:lnSpc>
+                <a:spcPct val="118000"/>
+              </a:lnSpc>
+            </a:pPr>
+            <a:r>
+              <a:rPr sz="1300" b="0">
+                <a:solidFill>
+                  <a:srgbClr val="5A6072"/>
+                </a:solidFill>
+                <a:latin typeface="Noto Sans CJK JP"/>
+                <a:ea typeface="Noto Sans CJK JP"/>
+              </a:rPr>
+              <a:t>"No solution formula" does not mean there are no roots — it means no uniform procedure expresses the roots by radicals alone.</a:t>
+            </a:r>
+          </a:p>
+        </p:txBody>
+      </p:sp>
+      <p:sp>
+        <p:nvSpPr>
+          <p:cNvPr id="9" name="Rectangle 8"/>
+          <p:cNvSpPr/>
+          <p:nvPr/>
+        </p:nvSpPr>
+        <p:spPr>
+          <a:xfrm>
+            <a:off x="640080" y="3108960"/>
+            <a:ext cx="502920" cy="502920"/>
+          </a:xfrm>
+          <a:prstGeom prst="rect">
+            <a:avLst/>
+          </a:prstGeom>
+          <a:solidFill>
+            <a:srgbClr val="0F9E8E"/>
+          </a:solidFill>
+          <a:ln>
+            <a:noFill/>
+          </a:ln>
+          <a:effectLst/>
+        </p:spPr>
+        <p:style>
+          <a:lnRef idx="1">
+            <a:schemeClr val="accent1"/>
+          </a:lnRef>
+          <a:fillRef idx="3">
+            <a:schemeClr val="accent1"/>
+          </a:fillRef>
+          <a:effectRef idx="2">
+            <a:schemeClr val="accent1"/>
+          </a:effectRef>
+          <a:fontRef idx="minor">
+            <a:schemeClr val="lt1"/>
+          </a:fontRef>
+        </p:style>
+        <p:txBody>
+          <a:bodyPr rtlCol="0" anchor="ctr"/>
+          <a:lstStyle/>
+          <a:p>
+            <a:pPr algn="ctr"/>
+          </a:p>
+        </p:txBody>
+      </p:sp>
+      <p:sp>
+        <p:nvSpPr>
+          <p:cNvPr id="10" name="TextBox 9"/>
+          <p:cNvSpPr txBox="1"/>
+          <p:nvPr/>
+        </p:nvSpPr>
+        <p:spPr>
+          <a:xfrm>
+            <a:off x="640080" y="3108960"/>
+            <a:ext cx="502920" cy="502920"/>
+          </a:xfrm>
+          <a:prstGeom prst="rect">
+            <a:avLst/>
+          </a:prstGeom>
+          <a:noFill/>
+        </p:spPr>
+        <p:txBody>
+          <a:bodyPr wrap="square" anchor="ctr" lIns="0" rIns="0" tIns="0" bIns="0">
+            <a:spAutoFit/>
+          </a:bodyPr>
+          <a:lstStyle/>
+          <a:p>
+            <a:pPr algn="ctr"/>
+            <a:r>
+              <a:rPr sz="2200" b="1" i="0">
+                <a:solidFill>
+                  <a:srgbClr val="FFFFFF"/>
+                </a:solidFill>
+                <a:latin typeface="Noto Sans CJK JP"/>
+                <a:ea typeface="Noto Sans CJK JP"/>
+              </a:rPr>
+              <a:t>2</a:t>
+            </a:r>
+          </a:p>
+        </p:txBody>
+      </p:sp>
+      <p:sp>
+        <p:nvSpPr>
+          <p:cNvPr id="11" name="TextBox 10"/>
+          <p:cNvSpPr txBox="1"/>
+          <p:nvPr/>
+        </p:nvSpPr>
+        <p:spPr>
+          <a:xfrm>
+            <a:off x="1325880" y="3090672"/>
+            <a:ext cx="10058400" cy="411480"/>
+          </a:xfrm>
+          <a:prstGeom prst="rect">
+            <a:avLst/>
+          </a:prstGeom>
+          <a:noFill/>
+        </p:spPr>
+        <p:txBody>
+          <a:bodyPr wrap="square" anchor="ctr" lIns="0" rIns="0" tIns="0" bIns="0">
+            <a:spAutoFit/>
+          </a:bodyPr>
+          <a:lstStyle/>
+          <a:p>
+            <a:pPr algn="l"/>
+            <a:r>
+              <a:rPr sz="1600" b="1" i="0">
+                <a:solidFill>
+                  <a:srgbClr val="1A2238"/>
+                </a:solidFill>
+                <a:latin typeface="Noto Sans CJK JP"/>
+                <a:ea typeface="Noto Sans CJK JP"/>
+              </a:rPr>
+              <a:t>Some individual quintics are solvable</a:t>
+            </a:r>
+            <a:r>
+              <a:rPr sz="1200" b="0" i="0">
+                <a:solidFill>
+                  <a:srgbClr val="0F9E8E"/>
+                </a:solidFill>
+                <a:latin typeface="Noto Sans CJK JP"/>
+                <a:ea typeface="Noto Sans CJK JP"/>
+              </a:rPr>
+              <a:t>   (main → P9)</a:t>
+            </a:r>
+          </a:p>
+        </p:txBody>
+      </p:sp>
+      <p:sp>
+        <p:nvSpPr>
+          <p:cNvPr id="12" name="TextBox 11"/>
+          <p:cNvSpPr txBox="1"/>
+          <p:nvPr/>
+        </p:nvSpPr>
+        <p:spPr>
+          <a:xfrm>
+            <a:off x="1325880" y="3566160"/>
+            <a:ext cx="10058400" cy="1097280"/>
+          </a:xfrm>
+          <a:prstGeom prst="rect">
+            <a:avLst/>
+          </a:prstGeom>
+          <a:noFill/>
+        </p:spPr>
+        <p:txBody>
+          <a:bodyPr wrap="square" lIns="0" rIns="0" tIns="0" bIns="0">
+            <a:spAutoFit/>
+          </a:bodyPr>
+          <a:lstStyle/>
+          <a:p>
+            <a:pPr>
+              <a:lnSpc>
+                <a:spcPct val="118000"/>
+              </a:lnSpc>
+            </a:pPr>
+            <a:r>
+              <a:rPr sz="1300" b="0">
+                <a:solidFill>
+                  <a:srgbClr val="5A6072"/>
+                </a:solidFill>
+                <a:latin typeface="Noto Sans CJK JP"/>
+                <a:ea typeface="Noto Sans CJK JP"/>
+              </a:rPr>
+              <a:t>"No formula for the quintic" does not mean every quintic is unsolvable. Some quintics are solvable by radicals (e.g. x⁵−1=0).</a:t>
+            </a:r>
+          </a:p>
+          <a:p>
+            <a:pPr>
+              <a:lnSpc>
+                <a:spcPct val="118000"/>
+              </a:lnSpc>
+            </a:pPr>
+            <a:r>
+              <a:rPr sz="1300" b="0">
+                <a:solidFill>
+                  <a:srgbClr val="5A6072"/>
+                </a:solidFill>
+                <a:latin typeface="Noto Sans CJK JP"/>
+                <a:ea typeface="Noto Sans CJK JP"/>
+              </a:rPr>
+              <a:t>The point is that for the </a:t>
+            </a:r>
+            <a:r>
+              <a:rPr sz="1300" b="1">
+                <a:solidFill>
+                  <a:srgbClr val="1A2238"/>
+                </a:solidFill>
+                <a:latin typeface="Noto Sans CJK JP"/>
+                <a:ea typeface="Noto Sans CJK JP"/>
+              </a:rPr>
+              <a:t>general quintic with literal coefficients</a:t>
+            </a:r>
+            <a:r>
+              <a:rPr sz="1300" b="0">
+                <a:solidFill>
+                  <a:srgbClr val="5A6072"/>
+                </a:solidFill>
+                <a:latin typeface="Noto Sans CJK JP"/>
+                <a:ea typeface="Noto Sans CJK JP"/>
+              </a:rPr>
+              <a:t>, no uniform formula in the four operations and radicals exists.</a:t>
+            </a:r>
+          </a:p>
+        </p:txBody>
+      </p:sp>
+      <p:sp>
+        <p:nvSpPr>
+          <p:cNvPr id="13" name="Rectangle 12"/>
+          <p:cNvSpPr/>
+          <p:nvPr/>
+        </p:nvSpPr>
+        <p:spPr>
+          <a:xfrm>
+            <a:off x="640080" y="4663440"/>
+            <a:ext cx="502920" cy="502920"/>
+          </a:xfrm>
+          <a:prstGeom prst="rect">
+            <a:avLst/>
+          </a:prstGeom>
+          <a:solidFill>
+            <a:srgbClr val="0F9E8E"/>
+          </a:solidFill>
+          <a:ln>
+            <a:noFill/>
+          </a:ln>
+          <a:effectLst/>
+        </p:spPr>
+        <p:style>
+          <a:lnRef idx="1">
+            <a:schemeClr val="accent1"/>
+          </a:lnRef>
+          <a:fillRef idx="3">
+            <a:schemeClr val="accent1"/>
+          </a:fillRef>
+          <a:effectRef idx="2">
+            <a:schemeClr val="accent1"/>
+          </a:effectRef>
+          <a:fontRef idx="minor">
+            <a:schemeClr val="lt1"/>
+          </a:fontRef>
+        </p:style>
+        <p:txBody>
+          <a:bodyPr rtlCol="0" anchor="ctr"/>
+          <a:lstStyle/>
+          <a:p>
+            <a:pPr algn="ctr"/>
+          </a:p>
+        </p:txBody>
+      </p:sp>
+      <p:sp>
+        <p:nvSpPr>
+          <p:cNvPr id="14" name="TextBox 13"/>
+          <p:cNvSpPr txBox="1"/>
+          <p:nvPr/>
+        </p:nvSpPr>
+        <p:spPr>
+          <a:xfrm>
+            <a:off x="640080" y="4663440"/>
+            <a:ext cx="502920" cy="502920"/>
+          </a:xfrm>
+          <a:prstGeom prst="rect">
+            <a:avLst/>
+          </a:prstGeom>
+          <a:noFill/>
+        </p:spPr>
+        <p:txBody>
+          <a:bodyPr wrap="square" anchor="ctr" lIns="0" rIns="0" tIns="0" bIns="0">
+            <a:spAutoFit/>
+          </a:bodyPr>
+          <a:lstStyle/>
+          <a:p>
+            <a:pPr algn="ctr"/>
+            <a:r>
+              <a:rPr sz="2200" b="1" i="0">
+                <a:solidFill>
+                  <a:srgbClr val="FFFFFF"/>
+                </a:solidFill>
+                <a:latin typeface="Noto Sans CJK JP"/>
+                <a:ea typeface="Noto Sans CJK JP"/>
+              </a:rPr>
+              <a:t>3</a:t>
+            </a:r>
+          </a:p>
+        </p:txBody>
+      </p:sp>
+      <p:sp>
+        <p:nvSpPr>
+          <p:cNvPr id="15" name="TextBox 14"/>
+          <p:cNvSpPr txBox="1"/>
+          <p:nvPr/>
+        </p:nvSpPr>
+        <p:spPr>
+          <a:xfrm>
+            <a:off x="1325880" y="4645152"/>
+            <a:ext cx="10058400" cy="411480"/>
+          </a:xfrm>
+          <a:prstGeom prst="rect">
+            <a:avLst/>
+          </a:prstGeom>
+          <a:noFill/>
+        </p:spPr>
+        <p:txBody>
+          <a:bodyPr wrap="square" anchor="ctr" lIns="0" rIns="0" tIns="0" bIns="0">
+            <a:spAutoFit/>
+          </a:bodyPr>
+          <a:lstStyle/>
+          <a:p>
+            <a:pPr algn="l"/>
+            <a:r>
+              <a:rPr sz="1600" b="1" i="0">
+                <a:solidFill>
+                  <a:srgbClr val="1A2238"/>
+                </a:solidFill>
+                <a:latin typeface="Noto Sans CJK JP"/>
+                <a:ea typeface="Noto Sans CJK JP"/>
+              </a:rPr>
+              <a:t>The Galois group is not all permutations of the roots</a:t>
+            </a:r>
+            <a:r>
+              <a:rPr sz="1200" b="0" i="0">
+                <a:solidFill>
+                  <a:srgbClr val="0F9E8E"/>
+                </a:solidFill>
+                <a:latin typeface="Noto Sans CJK JP"/>
+                <a:ea typeface="Noto Sans CJK JP"/>
+              </a:rPr>
+              <a:t>   (main → P3)</a:t>
+            </a:r>
+          </a:p>
+        </p:txBody>
+      </p:sp>
+      <p:sp>
+        <p:nvSpPr>
+          <p:cNvPr id="16" name="TextBox 15"/>
+          <p:cNvSpPr txBox="1"/>
+          <p:nvPr/>
+        </p:nvSpPr>
+        <p:spPr>
+          <a:xfrm>
+            <a:off x="1325880" y="5120640"/>
+            <a:ext cx="10058400" cy="1097280"/>
+          </a:xfrm>
+          <a:prstGeom prst="rect">
+            <a:avLst/>
+          </a:prstGeom>
+          <a:noFill/>
+        </p:spPr>
+        <p:txBody>
+          <a:bodyPr wrap="square" lIns="0" rIns="0" tIns="0" bIns="0">
+            <a:spAutoFit/>
+          </a:bodyPr>
+          <a:lstStyle/>
+          <a:p>
+            <a:pPr>
+              <a:lnSpc>
+                <a:spcPct val="118000"/>
+              </a:lnSpc>
+            </a:pPr>
+            <a:r>
+              <a:rPr sz="1300" b="0">
+                <a:solidFill>
+                  <a:srgbClr val="5A6072"/>
+                </a:solidFill>
+                <a:latin typeface="Noto Sans CJK JP"/>
+                <a:ea typeface="Noto Sans CJK JP"/>
+              </a:rPr>
+              <a:t>The Galois group is not every rearrangement of the roots, but only </a:t>
+            </a:r>
+            <a:r>
+              <a:rPr sz="1300" b="1">
+                <a:solidFill>
+                  <a:srgbClr val="1A2238"/>
+                </a:solidFill>
+                <a:latin typeface="Noto Sans CJK JP"/>
+                <a:ea typeface="Noto Sans CJK JP"/>
+              </a:rPr>
+              <a:t>the swaps that preserve the value of rational expressions built from the roots</a:t>
+            </a:r>
+            <a:r>
+              <a:rPr sz="1300" b="0">
+                <a:solidFill>
+                  <a:srgbClr val="5A6072"/>
+                </a:solidFill>
+                <a:latin typeface="Noto Sans CJK JP"/>
+                <a:ea typeface="Noto Sans CJK JP"/>
+              </a:rPr>
+              <a:t>.</a:t>
+            </a:r>
+          </a:p>
+          <a:p>
+            <a:pPr>
+              <a:lnSpc>
+                <a:spcPct val="118000"/>
+              </a:lnSpc>
+            </a:pPr>
+            <a:r>
+              <a:rPr sz="1300" b="0">
+                <a:solidFill>
+                  <a:srgbClr val="5A6072"/>
+                </a:solidFill>
+                <a:latin typeface="Noto Sans CJK JP"/>
+                <a:ea typeface="Noto Sans CJK JP"/>
+              </a:rPr>
+              <a:t>Roots indistinguishable from the rationals may be swapped, but swaps that break relations like sums or products are not allowed.</a:t>
+            </a:r>
+          </a:p>
+        </p:txBody>
+      </p:sp>
+      <p:sp>
+        <p:nvSpPr>
+          <p:cNvPr id="17" name="TextBox 16"/>
+          <p:cNvSpPr txBox="1"/>
+          <p:nvPr/>
+        </p:nvSpPr>
+        <p:spPr>
+          <a:xfrm>
+            <a:off x="11369040" y="6355080"/>
+            <a:ext cx="457200" cy="274320"/>
+          </a:xfrm>
+          <a:prstGeom prst="rect">
+            <a:avLst/>
+          </a:prstGeom>
+          <a:noFill/>
+        </p:spPr>
+        <p:txBody>
+          <a:bodyPr wrap="square" anchor="t" lIns="0" rIns="0" tIns="0" bIns="0">
+            <a:spAutoFit/>
+          </a:bodyPr>
+          <a:lstStyle/>
+          <a:p>
+            <a:pPr algn="r"/>
+            <a:r>
+              <a:rPr sz="1100" b="0" i="0">
+                <a:solidFill>
+                  <a:srgbClr val="6B7180"/>
+                </a:solidFill>
+                <a:latin typeface="Noto Sans CJK JP"/>
+                <a:ea typeface="Noto Sans CJK JP"/>
+              </a:rPr>
+              <a:t>17</a:t>
+            </a:r>
+          </a:p>
+        </p:txBody>
+      </p:sp>
+      <p:sp>
+        <p:nvSpPr>
+          <p:cNvPr id="18" name="TextBox 17"/>
+          <p:cNvSpPr txBox="1"/>
+          <p:nvPr/>
+        </p:nvSpPr>
+        <p:spPr>
+          <a:xfrm>
+            <a:off x="457200" y="6355080"/>
+            <a:ext cx="4572000" cy="274320"/>
+          </a:xfrm>
+          <a:prstGeom prst="rect">
+            <a:avLst/>
+          </a:prstGeom>
+          <a:noFill/>
+        </p:spPr>
+        <p:txBody>
+          <a:bodyPr wrap="square" anchor="t" lIns="0" rIns="0" tIns="0" bIns="0">
+            <a:spAutoFit/>
+          </a:bodyPr>
+          <a:lstStyle/>
+          <a:p>
+            <a:pPr algn="l"/>
+            <a:r>
+              <a:rPr sz="1000" b="0" i="0">
+                <a:solidFill>
+                  <a:srgbClr val="6B7180"/>
+                </a:solidFill>
+                <a:latin typeface="Noto Sans CJK JP"/>
+                <a:ea typeface="Noto Sans CJK JP"/>
+              </a:rPr>
+              <a:t>5garashi.com Design Office</a:t>
+            </a:r>
+          </a:p>
+        </p:txBody>
+      </p:sp>
+    </p:spTree>
+  </p:cSld>
+  <p:clrMapOvr>
+    <a:masterClrMapping/>
+  </p:clrMapOvr>
+</p:sld>
+</file>
+
+<file path=ppt/slides/slide18.xml><?xml version="1.0" encoding="utf-8"?>
+<p:sld xmlns:a="http://schemas.openxmlformats.org/drawingml/2006/main" xmlns:p="http://schemas.openxmlformats.org/presentationml/2006/main" xmlns:r="http://schemas.openxmlformats.org/officeDocument/2006/relationships">
+  <p:cSld>
+    <p:spTree>
+      <p:nvGrpSpPr>
+        <p:cNvPr id="1" name=""/>
+        <p:cNvGrpSpPr/>
+        <p:nvPr/>
+      </p:nvGrpSpPr>
+      <p:grpSpPr/>
+      <p:sp>
+        <p:nvSpPr>
+          <p:cNvPr id="2" name="Oval 1"/>
+          <p:cNvSpPr/>
+          <p:nvPr/>
+        </p:nvSpPr>
+        <p:spPr>
+          <a:xfrm>
+            <a:off x="640080" y="502920"/>
+            <a:ext cx="146304" cy="146304"/>
+          </a:xfrm>
+          <a:prstGeom prst="ellipse">
+            <a:avLst/>
+          </a:prstGeom>
+          <a:solidFill>
+            <a:srgbClr val="0F9E8E"/>
+          </a:solidFill>
+          <a:ln>
+            <a:noFill/>
+          </a:ln>
+          <a:effectLst/>
+        </p:spPr>
+        <p:style>
+          <a:lnRef idx="1">
+            <a:schemeClr val="accent1"/>
+          </a:lnRef>
+          <a:fillRef idx="3">
+            <a:schemeClr val="accent1"/>
+          </a:fillRef>
+          <a:effectRef idx="2">
+            <a:schemeClr val="accent1"/>
+          </a:effectRef>
+          <a:fontRef idx="minor">
+            <a:schemeClr val="lt1"/>
+          </a:fontRef>
+        </p:style>
+        <p:txBody>
+          <a:bodyPr rtlCol="0" anchor="ctr"/>
+          <a:lstStyle/>
+          <a:p>
+            <a:pPr algn="ctr"/>
+          </a:p>
+        </p:txBody>
+      </p:sp>
+      <p:sp>
+        <p:nvSpPr>
+          <p:cNvPr id="3" name="TextBox 2"/>
+          <p:cNvSpPr txBox="1"/>
+          <p:nvPr/>
+        </p:nvSpPr>
+        <p:spPr>
+          <a:xfrm>
+            <a:off x="896112" y="393192"/>
+            <a:ext cx="5486400" cy="365760"/>
+          </a:xfrm>
+          <a:prstGeom prst="rect">
+            <a:avLst/>
+          </a:prstGeom>
+          <a:noFill/>
+        </p:spPr>
+        <p:txBody>
+          <a:bodyPr wrap="square" anchor="t" lIns="0" rIns="0" tIns="0" bIns="0">
+            <a:spAutoFit/>
+          </a:bodyPr>
+          <a:lstStyle/>
+          <a:p>
+            <a:pPr algn="l"/>
+            <a:r>
+              <a:rPr sz="1600" b="1" i="0">
+                <a:solidFill>
+                  <a:srgbClr val="0F9E8E"/>
+                </a:solidFill>
+                <a:latin typeface="Noto Sans CJK JP"/>
+                <a:ea typeface="Noto Sans CJK JP"/>
+              </a:rPr>
+              <a:t>Appendix 3</a:t>
+            </a:r>
+          </a:p>
+        </p:txBody>
+      </p:sp>
+      <p:sp>
+        <p:nvSpPr>
+          <p:cNvPr id="4" name="TextBox 3"/>
+          <p:cNvSpPr txBox="1"/>
+          <p:nvPr/>
+        </p:nvSpPr>
+        <p:spPr>
+          <a:xfrm>
+            <a:off x="640080" y="822960"/>
+            <a:ext cx="10972800" cy="640080"/>
+          </a:xfrm>
+          <a:prstGeom prst="rect">
+            <a:avLst/>
+          </a:prstGeom>
+          <a:noFill/>
+        </p:spPr>
+        <p:txBody>
+          <a:bodyPr wrap="square" anchor="t" lIns="0" rIns="0" tIns="0" bIns="0">
+            <a:spAutoFit/>
+          </a:bodyPr>
+          <a:lstStyle/>
+          <a:p>
+            <a:pPr algn="l"/>
+            <a:r>
+              <a:rPr sz="2600" b="1" i="0">
+                <a:solidFill>
+                  <a:srgbClr val="1A2238"/>
+                </a:solidFill>
+                <a:latin typeface="Noto Sans CJK JP"/>
+                <a:ea typeface="Noto Sans CJK JP"/>
+              </a:rPr>
+              <a:t>Common early stumbling points (2/2)</a:t>
+            </a:r>
+          </a:p>
+        </p:txBody>
+      </p:sp>
+      <p:sp>
+        <p:nvSpPr>
+          <p:cNvPr id="5" name="Rectangle 4"/>
+          <p:cNvSpPr/>
+          <p:nvPr/>
+        </p:nvSpPr>
+        <p:spPr>
+          <a:xfrm>
+            <a:off x="640080" y="1554480"/>
+            <a:ext cx="502920" cy="502920"/>
+          </a:xfrm>
+          <a:prstGeom prst="rect">
+            <a:avLst/>
+          </a:prstGeom>
+          <a:solidFill>
+            <a:srgbClr val="0F9E8E"/>
+          </a:solidFill>
+          <a:ln>
+            <a:noFill/>
+          </a:ln>
+          <a:effectLst/>
+        </p:spPr>
+        <p:style>
+          <a:lnRef idx="1">
+            <a:schemeClr val="accent1"/>
+          </a:lnRef>
+          <a:fillRef idx="3">
+            <a:schemeClr val="accent1"/>
+          </a:fillRef>
+          <a:effectRef idx="2">
+            <a:schemeClr val="accent1"/>
+          </a:effectRef>
+          <a:fontRef idx="minor">
+            <a:schemeClr val="lt1"/>
+          </a:fontRef>
+        </p:style>
+        <p:txBody>
+          <a:bodyPr rtlCol="0" anchor="ctr"/>
+          <a:lstStyle/>
+          <a:p>
+            <a:pPr algn="ctr"/>
+          </a:p>
+        </p:txBody>
+      </p:sp>
+      <p:sp>
+        <p:nvSpPr>
+          <p:cNvPr id="6" name="TextBox 5"/>
+          <p:cNvSpPr txBox="1"/>
+          <p:nvPr/>
+        </p:nvSpPr>
+        <p:spPr>
+          <a:xfrm>
+            <a:off x="640080" y="1554480"/>
+            <a:ext cx="502920" cy="502920"/>
+          </a:xfrm>
+          <a:prstGeom prst="rect">
+            <a:avLst/>
+          </a:prstGeom>
+          <a:noFill/>
+        </p:spPr>
+        <p:txBody>
+          <a:bodyPr wrap="square" anchor="ctr" lIns="0" rIns="0" tIns="0" bIns="0">
+            <a:spAutoFit/>
+          </a:bodyPr>
+          <a:lstStyle/>
+          <a:p>
+            <a:pPr algn="ctr"/>
+            <a:r>
+              <a:rPr sz="2200" b="1" i="0">
+                <a:solidFill>
+                  <a:srgbClr val="FFFFFF"/>
+                </a:solidFill>
+                <a:latin typeface="Noto Sans CJK JP"/>
+                <a:ea typeface="Noto Sans CJK JP"/>
+              </a:rPr>
+              <a:t>4</a:t>
+            </a:r>
+          </a:p>
+        </p:txBody>
+      </p:sp>
+      <p:sp>
+        <p:nvSpPr>
+          <p:cNvPr id="7" name="TextBox 6"/>
+          <p:cNvSpPr txBox="1"/>
+          <p:nvPr/>
+        </p:nvSpPr>
+        <p:spPr>
+          <a:xfrm>
+            <a:off x="1325880" y="1536192"/>
+            <a:ext cx="10058400" cy="411480"/>
+          </a:xfrm>
+          <a:prstGeom prst="rect">
+            <a:avLst/>
+          </a:prstGeom>
+          <a:noFill/>
+        </p:spPr>
+        <p:txBody>
+          <a:bodyPr wrap="square" anchor="ctr" lIns="0" rIns="0" tIns="0" bIns="0">
+            <a:spAutoFit/>
+          </a:bodyPr>
+          <a:lstStyle/>
+          <a:p>
+            <a:pPr algn="l"/>
+            <a:r>
+              <a:rPr sz="1600" b="1" i="0">
+                <a:solidFill>
+                  <a:srgbClr val="1A2238"/>
+                </a:solidFill>
+                <a:latin typeface="Noto Sans CJK JP"/>
+                <a:ea typeface="Noto Sans CJK JP"/>
+              </a:rPr>
+              <a:t>"The group shrinks" means fewer allowed swaps</a:t>
+            </a:r>
+            <a:r>
+              <a:rPr sz="1200" b="0" i="0">
+                <a:solidFill>
+                  <a:srgbClr val="0F9E8E"/>
+                </a:solidFill>
+                <a:latin typeface="Noto Sans CJK JP"/>
+                <a:ea typeface="Noto Sans CJK JP"/>
+              </a:rPr>
+              <a:t>   (main → P4)</a:t>
+            </a:r>
+          </a:p>
+        </p:txBody>
+      </p:sp>
+      <p:sp>
+        <p:nvSpPr>
+          <p:cNvPr id="8" name="TextBox 7"/>
+          <p:cNvSpPr txBox="1"/>
+          <p:nvPr/>
+        </p:nvSpPr>
+        <p:spPr>
+          <a:xfrm>
+            <a:off x="1325880" y="2011680"/>
+            <a:ext cx="10058400" cy="1097280"/>
+          </a:xfrm>
+          <a:prstGeom prst="rect">
+            <a:avLst/>
+          </a:prstGeom>
+          <a:noFill/>
+        </p:spPr>
+        <p:txBody>
+          <a:bodyPr wrap="square" lIns="0" rIns="0" tIns="0" bIns="0">
+            <a:spAutoFit/>
+          </a:bodyPr>
+          <a:lstStyle/>
+          <a:p>
+            <a:pPr>
+              <a:lnSpc>
+                <a:spcPct val="118000"/>
+              </a:lnSpc>
+            </a:pPr>
+            <a:r>
+              <a:rPr sz="1300" b="0">
+                <a:solidFill>
+                  <a:srgbClr val="5A6072"/>
+                </a:solidFill>
+                <a:latin typeface="Noto Sans CJK JP"/>
+                <a:ea typeface="Noto Sans CJK JP"/>
+              </a:rPr>
+              <a:t>Adjoining a new element to the field makes previously indistinguishable numbers distinguishable, so fewer swaps are allowed.</a:t>
+            </a:r>
+          </a:p>
+          <a:p>
+            <a:pPr>
+              <a:lnSpc>
+                <a:spcPct val="118000"/>
+              </a:lnSpc>
+            </a:pPr>
+            <a:r>
+              <a:rPr sz="1300" b="0">
+                <a:solidFill>
+                  <a:srgbClr val="1A2238"/>
+                </a:solidFill>
+                <a:latin typeface="Noto Sans CJK JP"/>
+                <a:ea typeface="Noto Sans CJK JP"/>
+              </a:rPr>
+              <a:t>field grows → more known numbers → more numbers to fix → fewer allowed swaps → the Galois group shrinks.</a:t>
+            </a:r>
+          </a:p>
+        </p:txBody>
+      </p:sp>
+      <p:sp>
+        <p:nvSpPr>
+          <p:cNvPr id="9" name="Rectangle 8"/>
+          <p:cNvSpPr/>
+          <p:nvPr/>
+        </p:nvSpPr>
+        <p:spPr>
+          <a:xfrm>
+            <a:off x="640080" y="3108960"/>
+            <a:ext cx="502920" cy="502920"/>
+          </a:xfrm>
+          <a:prstGeom prst="rect">
+            <a:avLst/>
+          </a:prstGeom>
+          <a:solidFill>
+            <a:srgbClr val="0F9E8E"/>
+          </a:solidFill>
+          <a:ln>
+            <a:noFill/>
+          </a:ln>
+          <a:effectLst/>
+        </p:spPr>
+        <p:style>
+          <a:lnRef idx="1">
+            <a:schemeClr val="accent1"/>
+          </a:lnRef>
+          <a:fillRef idx="3">
+            <a:schemeClr val="accent1"/>
+          </a:fillRef>
+          <a:effectRef idx="2">
+            <a:schemeClr val="accent1"/>
+          </a:effectRef>
+          <a:fontRef idx="minor">
+            <a:schemeClr val="lt1"/>
+          </a:fontRef>
+        </p:style>
+        <p:txBody>
+          <a:bodyPr rtlCol="0" anchor="ctr"/>
+          <a:lstStyle/>
+          <a:p>
+            <a:pPr algn="ctr"/>
+          </a:p>
+        </p:txBody>
+      </p:sp>
+      <p:sp>
+        <p:nvSpPr>
+          <p:cNvPr id="10" name="TextBox 9"/>
+          <p:cNvSpPr txBox="1"/>
+          <p:nvPr/>
+        </p:nvSpPr>
+        <p:spPr>
+          <a:xfrm>
+            <a:off x="640080" y="3108960"/>
+            <a:ext cx="502920" cy="502920"/>
+          </a:xfrm>
+          <a:prstGeom prst="rect">
+            <a:avLst/>
+          </a:prstGeom>
+          <a:noFill/>
+        </p:spPr>
+        <p:txBody>
+          <a:bodyPr wrap="square" anchor="ctr" lIns="0" rIns="0" tIns="0" bIns="0">
+            <a:spAutoFit/>
+          </a:bodyPr>
+          <a:lstStyle/>
+          <a:p>
+            <a:pPr algn="ctr"/>
+            <a:r>
+              <a:rPr sz="2200" b="1" i="0">
+                <a:solidFill>
+                  <a:srgbClr val="FFFFFF"/>
+                </a:solidFill>
+                <a:latin typeface="Noto Sans CJK JP"/>
+                <a:ea typeface="Noto Sans CJK JP"/>
+              </a:rPr>
+              <a:t>5</a:t>
+            </a:r>
+          </a:p>
+        </p:txBody>
+      </p:sp>
+      <p:sp>
+        <p:nvSpPr>
+          <p:cNvPr id="11" name="TextBox 10"/>
+          <p:cNvSpPr txBox="1"/>
+          <p:nvPr/>
+        </p:nvSpPr>
+        <p:spPr>
+          <a:xfrm>
+            <a:off x="1325880" y="3090672"/>
+            <a:ext cx="10058400" cy="411480"/>
+          </a:xfrm>
+          <a:prstGeom prst="rect">
+            <a:avLst/>
+          </a:prstGeom>
+          <a:noFill/>
+        </p:spPr>
+        <p:txBody>
+          <a:bodyPr wrap="square" anchor="ctr" lIns="0" rIns="0" tIns="0" bIns="0">
+            <a:spAutoFit/>
+          </a:bodyPr>
+          <a:lstStyle/>
+          <a:p>
+            <a:pPr algn="l"/>
+            <a:r>
+              <a:rPr sz="1600" b="1" i="0">
+                <a:solidFill>
+                  <a:srgbClr val="1A2238"/>
+                </a:solidFill>
+                <a:latin typeface="Noto Sans CJK JP"/>
+                <a:ea typeface="Noto Sans CJK JP"/>
+              </a:rPr>
+              <a:t>The quotient’s order corresponds to which n-th root is adjoined</a:t>
+            </a:r>
+            <a:r>
+              <a:rPr sz="1200" b="0" i="0">
+                <a:solidFill>
+                  <a:srgbClr val="0F9E8E"/>
+                </a:solidFill>
+                <a:latin typeface="Noto Sans CJK JP"/>
+                <a:ea typeface="Noto Sans CJK JP"/>
+              </a:rPr>
+              <a:t>   (main → P4 ・ App.2 P15)</a:t>
+            </a:r>
+          </a:p>
+        </p:txBody>
+      </p:sp>
+      <p:sp>
+        <p:nvSpPr>
+          <p:cNvPr id="12" name="TextBox 11"/>
+          <p:cNvSpPr txBox="1"/>
+          <p:nvPr/>
+        </p:nvSpPr>
+        <p:spPr>
+          <a:xfrm>
+            <a:off x="1325880" y="3566160"/>
+            <a:ext cx="10058400" cy="1097280"/>
+          </a:xfrm>
+          <a:prstGeom prst="rect">
+            <a:avLst/>
+          </a:prstGeom>
+          <a:noFill/>
+        </p:spPr>
+        <p:txBody>
+          <a:bodyPr wrap="square" lIns="0" rIns="0" tIns="0" bIns="0">
+            <a:spAutoFit/>
+          </a:bodyPr>
+          <a:lstStyle/>
+          <a:p>
+            <a:pPr>
+              <a:lnSpc>
+                <a:spcPct val="105000"/>
+              </a:lnSpc>
+            </a:pPr>
+            <a:r>
+              <a:rPr sz="1200">
+                <a:solidFill>
+                  <a:srgbClr val="1A2238"/>
+                </a:solidFill>
+                <a:latin typeface="Noto Sans CJK JP"/>
+                <a:ea typeface="Noto Sans CJK JP"/>
+              </a:rPr>
+              <a:t>The quotient’s order equals the number of permutation steps to cycle once through the radical’s conjugate candidates and return.</a:t>
+            </a:r>
+          </a:p>
+          <a:p>
+            <a:pPr>
+              <a:lnSpc>
+                <a:spcPct val="105000"/>
+              </a:lnSpc>
+            </a:pPr>
+            <a:r>
+              <a:rPr sz="1200">
+                <a:solidFill>
+                  <a:srgbClr val="1A2238"/>
+                </a:solidFill>
+                <a:latin typeface="Noto Sans CJK JP"/>
+                <a:ea typeface="Noto Sans CJK JP"/>
+              </a:rPr>
+              <a:t>For a square root the candidates are √a, −√a (2 of them): √a → −√a → √a returns after 2 steps.</a:t>
+            </a:r>
+          </a:p>
+          <a:p>
+            <a:pPr>
+              <a:lnSpc>
+                <a:spcPct val="105000"/>
+              </a:lnSpc>
+            </a:pPr>
+            <a:r>
+              <a:rPr sz="1200">
+                <a:solidFill>
+                  <a:srgbClr val="1A2238"/>
+                </a:solidFill>
+                <a:latin typeface="Noto Sans CJK JP"/>
+                <a:ea typeface="Noto Sans CJK JP"/>
+              </a:rPr>
+              <a:t>For a cube root the candidates are ³√a, ω³√a, ω²³√a (3 of them): ³√a → ω³√a → ω²³√a → ³√a returns after 3 steps.</a:t>
+            </a:r>
+          </a:p>
+        </p:txBody>
+      </p:sp>
+      <p:sp>
+        <p:nvSpPr>
+          <p:cNvPr id="13" name="Rectangle 12"/>
+          <p:cNvSpPr/>
+          <p:nvPr/>
+        </p:nvSpPr>
+        <p:spPr>
+          <a:xfrm>
+            <a:off x="640080" y="4663440"/>
+            <a:ext cx="502920" cy="502920"/>
+          </a:xfrm>
+          <a:prstGeom prst="rect">
+            <a:avLst/>
+          </a:prstGeom>
+          <a:solidFill>
+            <a:srgbClr val="0F9E8E"/>
+          </a:solidFill>
+          <a:ln>
+            <a:noFill/>
+          </a:ln>
+          <a:effectLst/>
+        </p:spPr>
+        <p:style>
+          <a:lnRef idx="1">
+            <a:schemeClr val="accent1"/>
+          </a:lnRef>
+          <a:fillRef idx="3">
+            <a:schemeClr val="accent1"/>
+          </a:fillRef>
+          <a:effectRef idx="2">
+            <a:schemeClr val="accent1"/>
+          </a:effectRef>
+          <a:fontRef idx="minor">
+            <a:schemeClr val="lt1"/>
+          </a:fontRef>
+        </p:style>
+        <p:txBody>
+          <a:bodyPr rtlCol="0" anchor="ctr"/>
+          <a:lstStyle/>
+          <a:p>
+            <a:pPr algn="ctr"/>
+          </a:p>
+        </p:txBody>
+      </p:sp>
+      <p:sp>
+        <p:nvSpPr>
+          <p:cNvPr id="14" name="TextBox 13"/>
+          <p:cNvSpPr txBox="1"/>
+          <p:nvPr/>
+        </p:nvSpPr>
+        <p:spPr>
+          <a:xfrm>
+            <a:off x="640080" y="4663440"/>
+            <a:ext cx="502920" cy="502920"/>
+          </a:xfrm>
+          <a:prstGeom prst="rect">
+            <a:avLst/>
+          </a:prstGeom>
+          <a:noFill/>
+        </p:spPr>
+        <p:txBody>
+          <a:bodyPr wrap="square" anchor="ctr" lIns="0" rIns="0" tIns="0" bIns="0">
+            <a:spAutoFit/>
+          </a:bodyPr>
+          <a:lstStyle/>
+          <a:p>
+            <a:pPr algn="ctr"/>
+            <a:r>
+              <a:rPr sz="2200" b="1" i="0">
+                <a:solidFill>
+                  <a:srgbClr val="FFFFFF"/>
+                </a:solidFill>
+                <a:latin typeface="Noto Sans CJK JP"/>
+                <a:ea typeface="Noto Sans CJK JP"/>
+              </a:rPr>
+              <a:t>6</a:t>
+            </a:r>
+          </a:p>
+        </p:txBody>
+      </p:sp>
+      <p:sp>
+        <p:nvSpPr>
+          <p:cNvPr id="15" name="TextBox 14"/>
+          <p:cNvSpPr txBox="1"/>
+          <p:nvPr/>
+        </p:nvSpPr>
+        <p:spPr>
+          <a:xfrm>
+            <a:off x="1325880" y="4645152"/>
+            <a:ext cx="10058400" cy="411480"/>
+          </a:xfrm>
+          <a:prstGeom prst="rect">
+            <a:avLst/>
+          </a:prstGeom>
+          <a:noFill/>
+        </p:spPr>
+        <p:txBody>
+          <a:bodyPr wrap="square" anchor="ctr" lIns="0" rIns="0" tIns="0" bIns="0">
+            <a:spAutoFit/>
+          </a:bodyPr>
+          <a:lstStyle/>
+          <a:p>
+            <a:pPr algn="l"/>
+            <a:r>
+              <a:rPr sz="1600" b="1" i="0">
+                <a:solidFill>
+                  <a:srgbClr val="1A2238"/>
+                </a:solidFill>
+                <a:latin typeface="Noto Sans CJK JP"/>
+                <a:ea typeface="Noto Sans CJK JP"/>
+              </a:rPr>
+              <a:t>The adjoined element is not always a root itself</a:t>
+            </a:r>
+            <a:r>
+              <a:rPr sz="1200" b="0" i="0">
+                <a:solidFill>
+                  <a:srgbClr val="0F9E8E"/>
+                </a:solidFill>
+                <a:latin typeface="Noto Sans CJK JP"/>
+                <a:ea typeface="Noto Sans CJK JP"/>
+              </a:rPr>
+              <a:t>   (App.1 P13 ・ App.2 P15)</a:t>
+            </a:r>
+          </a:p>
+        </p:txBody>
+      </p:sp>
+      <p:sp>
+        <p:nvSpPr>
+          <p:cNvPr id="16" name="TextBox 15"/>
+          <p:cNvSpPr txBox="1"/>
+          <p:nvPr/>
+        </p:nvSpPr>
+        <p:spPr>
+          <a:xfrm>
+            <a:off x="1325880" y="5120640"/>
+            <a:ext cx="10058400" cy="1097280"/>
+          </a:xfrm>
+          <a:prstGeom prst="rect">
+            <a:avLst/>
+          </a:prstGeom>
+          <a:noFill/>
+        </p:spPr>
+        <p:txBody>
+          <a:bodyPr wrap="square" lIns="0" rIns="0" tIns="0" bIns="0">
+            <a:spAutoFit/>
+          </a:bodyPr>
+          <a:lstStyle/>
+          <a:p>
+            <a:pPr>
+              <a:lnSpc>
+                <a:spcPct val="105000"/>
+              </a:lnSpc>
+            </a:pPr>
+            <a:r>
+              <a:rPr sz="1200">
+                <a:solidFill>
+                  <a:srgbClr val="1A2238"/>
+                </a:solidFill>
+                <a:latin typeface="Noto Sans CJK JP"/>
+                <a:ea typeface="Noto Sans CJK JP"/>
+              </a:rPr>
+              <a:t>The element adjoined when shrinking is not necessarily a root of the equation; a helper number needed to express the roots may be adjoined first.</a:t>
+            </a:r>
+          </a:p>
+          <a:p>
+            <a:pPr>
+              <a:lnSpc>
+                <a:spcPct val="105000"/>
+              </a:lnSpc>
+            </a:pPr>
+            <a:r>
+              <a:rPr sz="1200">
+                <a:solidFill>
+                  <a:srgbClr val="1A2238"/>
+                </a:solidFill>
+                <a:latin typeface="Noto Sans CJK JP"/>
+                <a:ea typeface="Noto Sans CJK JP"/>
+              </a:rPr>
+              <a:t>Example: in ax²+bx+c=0, the √(b²−4ac) in the quadratic formula is not a root itself but a radical adjoined to express the roots.</a:t>
+            </a:r>
+          </a:p>
+          <a:p>
+            <a:pPr>
+              <a:lnSpc>
+                <a:spcPct val="105000"/>
+              </a:lnSpc>
+            </a:pPr>
+            <a:r>
+              <a:rPr sz="1200">
+                <a:solidFill>
+                  <a:srgbClr val="1A2238"/>
+                </a:solidFill>
+                <a:latin typeface="Noto Sans CJK JP"/>
+                <a:ea typeface="Noto Sans CJK JP"/>
+              </a:rPr>
+              <a:t>For x³−2 too, among the roots α,αω,αω² (α=³√2), ω is not a root, yet expressing all three needs ω.</a:t>
+            </a:r>
+          </a:p>
+          <a:p>
+            <a:pPr>
+              <a:lnSpc>
+                <a:spcPct val="105000"/>
+              </a:lnSpc>
+            </a:pPr>
+            <a:r>
+              <a:rPr sz="1200">
+                <a:solidFill>
+                  <a:srgbClr val="1A2238"/>
+                </a:solidFill>
+                <a:latin typeface="Noto Sans CJK JP"/>
+                <a:ea typeface="Noto Sans CJK JP"/>
+              </a:rPr>
+              <a:t>Solving by radicals = adjoining the needed numbers in order until the group shrinks to {e}.</a:t>
+            </a:r>
+          </a:p>
+        </p:txBody>
+      </p:sp>
+      <p:sp>
+        <p:nvSpPr>
+          <p:cNvPr id="17" name="TextBox 16"/>
+          <p:cNvSpPr txBox="1"/>
+          <p:nvPr/>
+        </p:nvSpPr>
+        <p:spPr>
+          <a:xfrm>
+            <a:off x="11369040" y="6355080"/>
+            <a:ext cx="457200" cy="274320"/>
+          </a:xfrm>
+          <a:prstGeom prst="rect">
+            <a:avLst/>
+          </a:prstGeom>
+          <a:noFill/>
+        </p:spPr>
+        <p:txBody>
+          <a:bodyPr wrap="square" anchor="t" lIns="0" rIns="0" tIns="0" bIns="0">
+            <a:spAutoFit/>
+          </a:bodyPr>
+          <a:lstStyle/>
+          <a:p>
+            <a:pPr algn="r"/>
+            <a:r>
+              <a:rPr sz="1100" b="0" i="0">
+                <a:solidFill>
+                  <a:srgbClr val="6B7180"/>
+                </a:solidFill>
+                <a:latin typeface="Noto Sans CJK JP"/>
+                <a:ea typeface="Noto Sans CJK JP"/>
+              </a:rPr>
+              <a:t>18</a:t>
+            </a:r>
+          </a:p>
+        </p:txBody>
+      </p:sp>
+      <p:sp>
+        <p:nvSpPr>
+          <p:cNvPr id="18" name="TextBox 17"/>
+          <p:cNvSpPr txBox="1"/>
+          <p:nvPr/>
+        </p:nvSpPr>
+        <p:spPr>
+          <a:xfrm>
+            <a:off x="457200" y="6355080"/>
+            <a:ext cx="4572000" cy="274320"/>
+          </a:xfrm>
+          <a:prstGeom prst="rect">
+            <a:avLst/>
+          </a:prstGeom>
+          <a:noFill/>
+        </p:spPr>
+        <p:txBody>
+          <a:bodyPr wrap="square" anchor="t" lIns="0" rIns="0" tIns="0" bIns="0">
+            <a:spAutoFit/>
+          </a:bodyPr>
+          <a:lstStyle/>
+          <a:p>
+            <a:pPr algn="l"/>
+            <a:r>
+              <a:rPr sz="1000" b="0" i="0">
+                <a:solidFill>
+                  <a:srgbClr val="6B7180"/>
+                </a:solidFill>
+                <a:latin typeface="Noto Sans CJK JP"/>
+                <a:ea typeface="Noto Sans CJK JP"/>
+              </a:rPr>
+              <a:t>5garashi.com Design Office</a:t>
+            </a:r>
+          </a:p>
+        </p:txBody>
+      </p:sp>
+    </p:spTree>
+  </p:cSld>
+  <p:clrMapOvr>
+    <a:masterClrMapping/>
+  </p:clrMapOvr>
+</p:sld>
+</file>
+
 <file path=ppt/slides/slide2.xml><?xml version="1.0" encoding="utf-8"?>
 <p:sld xmlns:a="http://schemas.openxmlformats.org/drawingml/2006/main" xmlns:r="http://schemas.openxmlformats.org/officeDocument/2006/relationships" xmlns:p="http://schemas.openxmlformats.org/presentationml/2006/main">
   <p:cSld name="Slide 2">
@@ -10732,7 +10732,7 @@
                 <a:ea typeface="Noto Sans CJK JP"/>
                 <a:cs typeface="Noto Sans CJK JP" pitchFamily="34" charset="-120"/>
               </a:rPr>
-              <a:t>∀r, ∀σ∈G :  r(α₁,…,αₙ)∈Q  ⟹  σ( r(α₁,…,αₙ) )∈Q</a:t>
+              <a:t>∀r, ∀σ∈G :  r(α₁,…,αₙ)∈Q  ⇒  σ( r(α₁,…,αₙ) )∈Q</a:t>
             </a:r>
             <a:endParaRPr lang="en-US" sz="2100" dirty="0"/>
           </a:p>
@@ -11540,7 +11540,7 @@
                 <a:ea typeface="Noto Sans CJK JP"/>
                 <a:cs typeface="Noto Sans CJK JP" pitchFamily="34" charset="-120"/>
               </a:rPr>
-              <a:t>L ⟼ Gal(K/L) = Aut(K/L) = { σ∈G : σ(x)=x (∀x∈L) }</a:t>
+              <a:t>L ↦ Gal(K/L) = Aut(K/L) = { σ∈G : σ(x)=x (∀x∈L) }</a:t>
             </a:r>
             <a:endParaRPr lang="en-US" sz="1450" dirty="0"/>
           </a:p>
